--- a/workshops/EST-Napoli_Innovation_Festival/PRG32_Breakout_C.pptx
+++ b/workshops/EST-Napoli_Innovation_Festival/PRG32_Breakout_C.pptx
@@ -164,7 +164,7 @@
   <p:extLst>
     <p:ext uri="{521415D9-36F7-43E2-AB2F-B90AF26B5E84}">
       <p14:sectionLst xmlns:p14="http://schemas.microsoft.com/office/powerpoint/2010/main">
-        <p14:section name="Opening" id="{dc1e4721-6c88-49d6-85a3-4541533f858c}">
+        <p14:section name="Opening" id="{0e6bd59e-ca57-7a30-f970-93b422095ba5}">
           <p14:sldIdLst>
             <p14:sldId id="256"/>
             <p14:sldId id="257"/>
@@ -172,7 +172,7 @@
             <p14:sldId id="259"/>
           </p14:sldIdLst>
         </p14:section>
-        <p14:section name="L'idea" id="{d58eb4a0-80bd-9250-9417-c2eaec4b2933}">
+        <p14:section name="L'idea" id="{415e6fb5-8836-7b98-ef2e-c949c7b5983d}">
           <p14:sldIdLst>
             <p14:sldId id="260"/>
             <p14:sldId id="261"/>
@@ -184,7 +184,7 @@
             <p14:sldId id="267"/>
           </p14:sldIdLst>
         </p14:section>
-        <p14:section name="La piattaforma PRG32" id="{19b13381-12a3-196b-1304-885a1916c0eb}">
+        <p14:section name="La piattaforma PRG32" id="{800817cb-4376-2cfd-8350-ac75cd1b39f5}">
           <p14:sldIdLst>
             <p14:sldId id="268"/>
             <p14:sldId id="269"/>
@@ -196,7 +196,7 @@
             <p14:sldId id="275"/>
           </p14:sldIdLst>
         </p14:section>
-        <p14:section name="Il ciclo init, update, draw" id="{70d066aa-bc6e-5505-5f23-8306788873a0}">
+        <p14:section name="Il ciclo init, update, draw" id="{da5a4bad-3f9d-0daf-0ec8-c37c8d39f50c}">
           <p14:sldIdLst>
             <p14:sldId id="276"/>
             <p14:sldId id="277"/>
@@ -209,7 +209,7 @@
             <p14:sldId id="284"/>
           </p14:sldIdLst>
         </p14:section>
-        <p14:section name="Breakout in C" id="{5036b907-6788-9963-b2b9-335de28bb09a}">
+        <p14:section name="Breakout in C" id="{98e890e2-e442-31c7-734e-41dd7a3e35f1}">
           <p14:sldIdLst>
             <p14:sldId id="285"/>
             <p14:sldId id="286"/>
@@ -237,7 +237,7 @@
             <p14:sldId id="308"/>
           </p14:sldIdLst>
         </p14:section>
-        <p14:section name="Sfide finali" id="{beb1a1a7-0540-2ac7-63b3-a0e8dbb61d9b}">
+        <p14:section name="Sfide finali" id="{52dd498d-4e7c-00e3-e353-ec496c078a7a}">
           <p14:sldIdLst>
             <p14:sldId id="309"/>
             <p14:sldId id="310"/>
@@ -245,7 +245,7 @@
             <p14:sldId id="312"/>
           </p14:sldIdLst>
         </p14:section>
-        <p14:section name="Closing" id="{77c926a4-209a-5f3e-8aa6-b1456a00dea3}">
+        <p14:section name="Closing" id="{6ea30b40-e9a2-185d-bf75-160073ea1e70}">
           <p14:sldIdLst>
             <p14:sldId id="313"/>
           </p14:sldIdLst>
@@ -12251,7 +12251,7 @@
               <a:buNone/>
             </a:pPr>
             <a:r>
-              <a:rPr lang="en-US" sz="1022" dirty="0">
+              <a:rPr lang="en-US" sz="1398" dirty="0">
                 <a:solidFill>
                   <a:srgbClr val="5B6B78"/>
                 </a:solidFill>
@@ -12261,7 +12261,7 @@
               </a:rPr>
               <a:t>+0</a:t>
             </a:r>
-            <a:endParaRPr lang="en-US" sz="1022" dirty="0"/>
+            <a:endParaRPr lang="en-US" sz="1398" dirty="0"/>
           </a:p>
         </p:txBody>
       </p:sp>
@@ -12296,7 +12296,7 @@
               <a:buNone/>
             </a:pPr>
             <a:r>
-              <a:rPr lang="en-US" sz="1222" b="1" dirty="0">
+              <a:rPr lang="en-US" sz="1598" b="1" dirty="0">
                 <a:solidFill>
                   <a:srgbClr val="FFFFFF"/>
                 </a:solidFill>
@@ -12306,7 +12306,7 @@
               </a:rPr>
               <a:t>PRG2</a:t>
             </a:r>
-            <a:endParaRPr lang="en-US" sz="1222" dirty="0"/>
+            <a:endParaRPr lang="en-US" sz="1598" dirty="0"/>
           </a:p>
         </p:txBody>
       </p:sp>
@@ -12335,7 +12335,7 @@
               <a:buNone/>
             </a:pPr>
             <a:r>
-              <a:rPr lang="en-US" sz="1022" dirty="0">
+              <a:rPr lang="en-US" sz="1398" dirty="0">
                 <a:solidFill>
                   <a:srgbClr val="5B6B78"/>
                 </a:solidFill>
@@ -12345,7 +12345,7 @@
               </a:rPr>
               <a:t>4 byte</a:t>
             </a:r>
-            <a:endParaRPr lang="en-US" sz="1022" dirty="0"/>
+            <a:endParaRPr lang="en-US" sz="1398" dirty="0"/>
           </a:p>
         </p:txBody>
       </p:sp>
@@ -12374,7 +12374,7 @@
               <a:buNone/>
             </a:pPr>
             <a:r>
-              <a:rPr lang="en-US" sz="1222" dirty="0">
+              <a:rPr lang="en-US" sz="1598" dirty="0">
                 <a:solidFill>
                   <a:srgbClr val="1B2530"/>
                 </a:solidFill>
@@ -12384,7 +12384,7 @@
               </a:rPr>
               <a:t>firma: "sono una cartuccia PRG32"</a:t>
             </a:r>
-            <a:endParaRPr lang="en-US" sz="1222" dirty="0"/>
+            <a:endParaRPr lang="en-US" sz="1598" dirty="0"/>
           </a:p>
         </p:txBody>
       </p:sp>
@@ -12413,7 +12413,7 @@
               <a:buNone/>
             </a:pPr>
             <a:r>
-              <a:rPr lang="en-US" sz="1022" dirty="0">
+              <a:rPr lang="en-US" sz="1398" dirty="0">
                 <a:solidFill>
                   <a:srgbClr val="5B6B78"/>
                 </a:solidFill>
@@ -12423,7 +12423,7 @@
               </a:rPr>
               <a:t>+4</a:t>
             </a:r>
-            <a:endParaRPr lang="en-US" sz="1022" dirty="0"/>
+            <a:endParaRPr lang="en-US" sz="1398" dirty="0"/>
           </a:p>
         </p:txBody>
       </p:sp>
@@ -12458,7 +12458,7 @@
               <a:buNone/>
             </a:pPr>
             <a:r>
-              <a:rPr lang="en-US" sz="1222" b="1" dirty="0">
+              <a:rPr lang="en-US" sz="1598" b="1" dirty="0">
                 <a:solidFill>
                   <a:srgbClr val="FFFFFF"/>
                 </a:solidFill>
@@ -12468,7 +12468,7 @@
               </a:rPr>
               <a:t>versione ABI</a:t>
             </a:r>
-            <a:endParaRPr lang="en-US" sz="1222" dirty="0"/>
+            <a:endParaRPr lang="en-US" sz="1598" dirty="0"/>
           </a:p>
         </p:txBody>
       </p:sp>
@@ -12497,7 +12497,7 @@
               <a:buNone/>
             </a:pPr>
             <a:r>
-              <a:rPr lang="en-US" sz="1022" dirty="0">
+              <a:rPr lang="en-US" sz="1398" dirty="0">
                 <a:solidFill>
                   <a:srgbClr val="5B6B78"/>
                 </a:solidFill>
@@ -12507,7 +12507,7 @@
               </a:rPr>
               <a:t>4 byte</a:t>
             </a:r>
-            <a:endParaRPr lang="en-US" sz="1022" dirty="0"/>
+            <a:endParaRPr lang="en-US" sz="1398" dirty="0"/>
           </a:p>
         </p:txBody>
       </p:sp>
@@ -12536,7 +12536,7 @@
               <a:buNone/>
             </a:pPr>
             <a:r>
-              <a:rPr lang="en-US" sz="1222" dirty="0">
+              <a:rPr lang="en-US" sz="1598" dirty="0">
                 <a:solidFill>
                   <a:srgbClr val="1B2530"/>
                 </a:solidFill>
@@ -12546,7 +12546,7 @@
               </a:rPr>
               <a:t>quale tabella di funzioni si aspetta</a:t>
             </a:r>
-            <a:endParaRPr lang="en-US" sz="1222" dirty="0"/>
+            <a:endParaRPr lang="en-US" sz="1598" dirty="0"/>
           </a:p>
         </p:txBody>
       </p:sp>
@@ -12575,7 +12575,7 @@
               <a:buNone/>
             </a:pPr>
             <a:r>
-              <a:rPr lang="en-US" sz="1022" dirty="0">
+              <a:rPr lang="en-US" sz="1398" dirty="0">
                 <a:solidFill>
                   <a:srgbClr val="5B6B78"/>
                 </a:solidFill>
@@ -12585,7 +12585,7 @@
               </a:rPr>
               <a:t>+8</a:t>
             </a:r>
-            <a:endParaRPr lang="en-US" sz="1022" dirty="0"/>
+            <a:endParaRPr lang="en-US" sz="1398" dirty="0"/>
           </a:p>
         </p:txBody>
       </p:sp>
@@ -12620,7 +12620,7 @@
               <a:buNone/>
             </a:pPr>
             <a:r>
-              <a:rPr lang="en-US" sz="1222" b="1" dirty="0">
+              <a:rPr lang="en-US" sz="1598" b="1" dirty="0">
                 <a:solidFill>
                   <a:srgbClr val="FFFFFF"/>
                 </a:solidFill>
@@ -12630,7 +12630,7 @@
               </a:rPr>
               <a:t>dimensioni, indirizzo</a:t>
             </a:r>
-            <a:endParaRPr lang="en-US" sz="1222" dirty="0"/>
+            <a:endParaRPr lang="en-US" sz="1598" dirty="0"/>
           </a:p>
         </p:txBody>
       </p:sp>
@@ -12659,7 +12659,7 @@
               <a:buNone/>
             </a:pPr>
             <a:r>
-              <a:rPr lang="en-US" sz="1022" dirty="0">
+              <a:rPr lang="en-US" sz="1398" dirty="0">
                 <a:solidFill>
                   <a:srgbClr val="5B6B78"/>
                 </a:solidFill>
@@ -12669,7 +12669,7 @@
               </a:rPr>
               <a:t>16 byte</a:t>
             </a:r>
-            <a:endParaRPr lang="en-US" sz="1022" dirty="0"/>
+            <a:endParaRPr lang="en-US" sz="1398" dirty="0"/>
           </a:p>
         </p:txBody>
       </p:sp>
@@ -12698,7 +12698,7 @@
               <a:buNone/>
             </a:pPr>
             <a:r>
-              <a:rPr lang="en-US" sz="1222" dirty="0">
+              <a:rPr lang="en-US" sz="1598" dirty="0">
                 <a:solidFill>
                   <a:srgbClr val="1B2530"/>
                 </a:solidFill>
@@ -12708,7 +12708,7 @@
               </a:rPr>
               <a:t>dove caricare il codice e quanto è grande</a:t>
             </a:r>
-            <a:endParaRPr lang="en-US" sz="1222" dirty="0"/>
+            <a:endParaRPr lang="en-US" sz="1598" dirty="0"/>
           </a:p>
         </p:txBody>
       </p:sp>
@@ -12737,7 +12737,7 @@
               <a:buNone/>
             </a:pPr>
             <a:r>
-              <a:rPr lang="en-US" sz="1022" dirty="0">
+              <a:rPr lang="en-US" sz="1398" dirty="0">
                 <a:solidFill>
                   <a:srgbClr val="5B6B78"/>
                 </a:solidFill>
@@ -12747,7 +12747,7 @@
               </a:rPr>
               <a:t>+24</a:t>
             </a:r>
-            <a:endParaRPr lang="en-US" sz="1022" dirty="0"/>
+            <a:endParaRPr lang="en-US" sz="1398" dirty="0"/>
           </a:p>
         </p:txBody>
       </p:sp>
@@ -12782,7 +12782,7 @@
               <a:buNone/>
             </a:pPr>
             <a:r>
-              <a:rPr lang="en-US" sz="1222" b="1" dirty="0">
+              <a:rPr lang="en-US" sz="1598" b="1" dirty="0">
                 <a:solidFill>
                   <a:srgbClr val="FFFFFF"/>
                 </a:solidFill>
@@ -12792,7 +12792,7 @@
               </a:rPr>
               <a:t>init / update / draw</a:t>
             </a:r>
-            <a:endParaRPr lang="en-US" sz="1222" dirty="0"/>
+            <a:endParaRPr lang="en-US" sz="1598" dirty="0"/>
           </a:p>
         </p:txBody>
       </p:sp>
@@ -12821,7 +12821,7 @@
               <a:buNone/>
             </a:pPr>
             <a:r>
-              <a:rPr lang="en-US" sz="1022" dirty="0">
+              <a:rPr lang="en-US" sz="1398" dirty="0">
                 <a:solidFill>
                   <a:srgbClr val="5B6B78"/>
                 </a:solidFill>
@@ -12831,7 +12831,7 @@
               </a:rPr>
               <a:t>12 byte</a:t>
             </a:r>
-            <a:endParaRPr lang="en-US" sz="1022" dirty="0"/>
+            <a:endParaRPr lang="en-US" sz="1398" dirty="0"/>
           </a:p>
         </p:txBody>
       </p:sp>
@@ -12860,7 +12860,7 @@
               <a:buNone/>
             </a:pPr>
             <a:r>
-              <a:rPr lang="en-US" sz="1222" dirty="0">
+              <a:rPr lang="en-US" sz="1598" dirty="0">
                 <a:solidFill>
                   <a:srgbClr val="1B2530"/>
                 </a:solidFill>
@@ -12870,7 +12870,7 @@
               </a:rPr>
               <a:t>dove iniziano le tre funzioni del gioco</a:t>
             </a:r>
-            <a:endParaRPr lang="en-US" sz="1222" dirty="0"/>
+            <a:endParaRPr lang="en-US" sz="1598" dirty="0"/>
           </a:p>
         </p:txBody>
       </p:sp>
@@ -12899,7 +12899,7 @@
               <a:buNone/>
             </a:pPr>
             <a:r>
-              <a:rPr lang="en-US" sz="1022" dirty="0">
+              <a:rPr lang="en-US" sz="1398" dirty="0">
                 <a:solidFill>
                   <a:srgbClr val="5B6B78"/>
                 </a:solidFill>
@@ -12909,7 +12909,7 @@
               </a:rPr>
               <a:t>+36</a:t>
             </a:r>
-            <a:endParaRPr lang="en-US" sz="1022" dirty="0"/>
+            <a:endParaRPr lang="en-US" sz="1398" dirty="0"/>
           </a:p>
         </p:txBody>
       </p:sp>
@@ -12944,7 +12944,7 @@
               <a:buNone/>
             </a:pPr>
             <a:r>
-              <a:rPr lang="en-US" sz="1222" b="1" dirty="0">
+              <a:rPr lang="en-US" sz="1598" b="1" dirty="0">
                 <a:solidFill>
                   <a:srgbClr val="FFFFFF"/>
                 </a:solidFill>
@@ -12954,7 +12954,7 @@
               </a:rPr>
               <a:t>CRC32</a:t>
             </a:r>
-            <a:endParaRPr lang="en-US" sz="1222" dirty="0"/>
+            <a:endParaRPr lang="en-US" sz="1598" dirty="0"/>
           </a:p>
         </p:txBody>
       </p:sp>
@@ -12983,7 +12983,7 @@
               <a:buNone/>
             </a:pPr>
             <a:r>
-              <a:rPr lang="en-US" sz="1022" dirty="0">
+              <a:rPr lang="en-US" sz="1398" dirty="0">
                 <a:solidFill>
                   <a:srgbClr val="5B6B78"/>
                 </a:solidFill>
@@ -12993,7 +12993,7 @@
               </a:rPr>
               <a:t>4 byte</a:t>
             </a:r>
-            <a:endParaRPr lang="en-US" sz="1022" dirty="0"/>
+            <a:endParaRPr lang="en-US" sz="1398" dirty="0"/>
           </a:p>
         </p:txBody>
       </p:sp>
@@ -13022,7 +13022,7 @@
               <a:buNone/>
             </a:pPr>
             <a:r>
-              <a:rPr lang="en-US" sz="1222" dirty="0">
+              <a:rPr lang="en-US" sz="1598" dirty="0">
                 <a:solidFill>
                   <a:srgbClr val="1B2530"/>
                 </a:solidFill>
@@ -13032,7 +13032,7 @@
               </a:rPr>
               <a:t>controllo: il file è arrivato intatto?</a:t>
             </a:r>
-            <a:endParaRPr lang="en-US" sz="1222" dirty="0"/>
+            <a:endParaRPr lang="en-US" sz="1598" dirty="0"/>
           </a:p>
         </p:txBody>
       </p:sp>
@@ -13061,7 +13061,7 @@
               <a:buNone/>
             </a:pPr>
             <a:r>
-              <a:rPr lang="en-US" sz="1022" dirty="0">
+              <a:rPr lang="en-US" sz="1398" dirty="0">
                 <a:solidFill>
                   <a:srgbClr val="5B6B78"/>
                 </a:solidFill>
@@ -13071,7 +13071,7 @@
               </a:rPr>
               <a:t>+40</a:t>
             </a:r>
-            <a:endParaRPr lang="en-US" sz="1022" dirty="0"/>
+            <a:endParaRPr lang="en-US" sz="1398" dirty="0"/>
           </a:p>
         </p:txBody>
       </p:sp>
@@ -13106,7 +13106,7 @@
               <a:buNone/>
             </a:pPr>
             <a:r>
-              <a:rPr lang="en-US" sz="1222" b="1" dirty="0">
+              <a:rPr lang="en-US" sz="1598" b="1" dirty="0">
                 <a:solidFill>
                   <a:srgbClr val="FFFFFF"/>
                 </a:solidFill>
@@ -13116,7 +13116,7 @@
               </a:rPr>
               <a:t>nome</a:t>
             </a:r>
-            <a:endParaRPr lang="en-US" sz="1222" dirty="0"/>
+            <a:endParaRPr lang="en-US" sz="1598" dirty="0"/>
           </a:p>
         </p:txBody>
       </p:sp>
@@ -13145,7 +13145,7 @@
               <a:buNone/>
             </a:pPr>
             <a:r>
-              <a:rPr lang="en-US" sz="1022" dirty="0">
+              <a:rPr lang="en-US" sz="1398" dirty="0">
                 <a:solidFill>
                   <a:srgbClr val="5B6B78"/>
                 </a:solidFill>
@@ -13155,7 +13155,7 @@
               </a:rPr>
               <a:t>32 byte</a:t>
             </a:r>
-            <a:endParaRPr lang="en-US" sz="1022" dirty="0"/>
+            <a:endParaRPr lang="en-US" sz="1398" dirty="0"/>
           </a:p>
         </p:txBody>
       </p:sp>
@@ -13184,7 +13184,7 @@
               <a:buNone/>
             </a:pPr>
             <a:r>
-              <a:rPr lang="en-US" sz="1222" dirty="0">
+              <a:rPr lang="en-US" sz="1598" dirty="0">
                 <a:solidFill>
                   <a:srgbClr val="1B2530"/>
                 </a:solidFill>
@@ -13194,7 +13194,7 @@
               </a:rPr>
               <a:t>quello che si legge nel menu</a:t>
             </a:r>
-            <a:endParaRPr lang="en-US" sz="1222" dirty="0"/>
+            <a:endParaRPr lang="en-US" sz="1598" dirty="0"/>
           </a:p>
         </p:txBody>
       </p:sp>
@@ -13223,7 +13223,7 @@
               <a:buNone/>
             </a:pPr>
             <a:r>
-              <a:rPr lang="en-US" sz="1022" dirty="0">
+              <a:rPr lang="en-US" sz="1398" dirty="0">
                 <a:solidFill>
                   <a:srgbClr val="5B6B78"/>
                 </a:solidFill>
@@ -13233,7 +13233,7 @@
               </a:rPr>
               <a:t>+72</a:t>
             </a:r>
-            <a:endParaRPr lang="en-US" sz="1022" dirty="0"/>
+            <a:endParaRPr lang="en-US" sz="1398" dirty="0"/>
           </a:p>
         </p:txBody>
       </p:sp>
@@ -13268,7 +13268,7 @@
               <a:buNone/>
             </a:pPr>
             <a:r>
-              <a:rPr lang="en-US" sz="1222" b="1" dirty="0">
+              <a:rPr lang="en-US" sz="1398" b="1" dirty="0">
                 <a:solidFill>
                   <a:srgbClr val="FFFFFF"/>
                 </a:solidFill>
@@ -13278,7 +13278,7 @@
               </a:rPr>
               <a:t>hash ABI, funzioni richieste</a:t>
             </a:r>
-            <a:endParaRPr lang="en-US" sz="1222" dirty="0"/>
+            <a:endParaRPr lang="en-US" sz="1398" dirty="0"/>
           </a:p>
         </p:txBody>
       </p:sp>
@@ -13307,7 +13307,7 @@
               <a:buNone/>
             </a:pPr>
             <a:r>
-              <a:rPr lang="en-US" sz="1022" dirty="0">
+              <a:rPr lang="en-US" sz="1398" dirty="0">
                 <a:solidFill>
                   <a:srgbClr val="5B6B78"/>
                 </a:solidFill>
@@ -13317,7 +13317,7 @@
               </a:rPr>
               <a:t>28 byte</a:t>
             </a:r>
-            <a:endParaRPr lang="en-US" sz="1022" dirty="0"/>
+            <a:endParaRPr lang="en-US" sz="1398" dirty="0"/>
           </a:p>
         </p:txBody>
       </p:sp>
@@ -13346,7 +13346,7 @@
               <a:buNone/>
             </a:pPr>
             <a:r>
-              <a:rPr lang="en-US" sz="1222" dirty="0">
+              <a:rPr lang="en-US" sz="1598" dirty="0">
                 <a:solidFill>
                   <a:srgbClr val="1B2530"/>
                 </a:solidFill>
@@ -13356,7 +13356,7 @@
               </a:rPr>
               <a:t>la console rifiuta ciò che non può eseguire</a:t>
             </a:r>
-            <a:endParaRPr lang="en-US" sz="1222" dirty="0"/>
+            <a:endParaRPr lang="en-US" sz="1598" dirty="0"/>
           </a:p>
         </p:txBody>
       </p:sp>
@@ -13384,7 +13384,7 @@
             <a:pPr algn="r" indent="0" marL="0">
               <a:buNone/>
             </a:pPr>
-            <a:endParaRPr lang="en-US" sz="1022" dirty="0"/>
+            <a:endParaRPr lang="en-US" sz="1398" dirty="0"/>
           </a:p>
         </p:txBody>
       </p:sp>
@@ -13419,7 +13419,7 @@
               <a:buNone/>
             </a:pPr>
             <a:r>
-              <a:rPr lang="en-US" sz="1222" b="1" dirty="0">
+              <a:rPr lang="en-US" sz="1598" b="1" dirty="0">
                 <a:solidFill>
                   <a:srgbClr val="FFFFFF"/>
                 </a:solidFill>
@@ -13429,7 +13429,7 @@
               </a:rPr>
               <a:t>codice e dati del gioco</a:t>
             </a:r>
-            <a:endParaRPr lang="en-US" sz="1222" dirty="0"/>
+            <a:endParaRPr lang="en-US" sz="1598" dirty="0"/>
           </a:p>
         </p:txBody>
       </p:sp>
@@ -13458,7 +13458,7 @@
               <a:buNone/>
             </a:pPr>
             <a:r>
-              <a:rPr lang="en-US" sz="1022" dirty="0">
+              <a:rPr lang="en-US" sz="1398" dirty="0">
                 <a:solidFill>
                   <a:srgbClr val="5B6B78"/>
                 </a:solidFill>
@@ -13468,7 +13468,7 @@
               </a:rPr>
               <a:t>~3,4 KiB</a:t>
             </a:r>
-            <a:endParaRPr lang="en-US" sz="1022" dirty="0"/>
+            <a:endParaRPr lang="en-US" sz="1398" dirty="0"/>
           </a:p>
         </p:txBody>
       </p:sp>
@@ -13497,7 +13497,7 @@
               <a:buNone/>
             </a:pPr>
             <a:r>
-              <a:rPr lang="en-US" sz="1222" dirty="0">
+              <a:rPr lang="en-US" sz="1598" dirty="0">
                 <a:solidFill>
                   <a:srgbClr val="1B2530"/>
                 </a:solidFill>
@@ -13507,7 +13507,7 @@
               </a:rPr>
               <a:t>le istruzioni RISC-V che scriviamo oggi</a:t>
             </a:r>
-            <a:endParaRPr lang="en-US" sz="1222" dirty="0"/>
+            <a:endParaRPr lang="en-US" sz="1598" dirty="0"/>
           </a:p>
         </p:txBody>
       </p:sp>
@@ -23578,7 +23578,7 @@
               <a:buNone/>
             </a:pPr>
             <a:r>
-              <a:rPr lang="en-US" sz="1000" dirty="0">
+              <a:rPr lang="en-US" sz="1250" dirty="0">
                 <a:solidFill>
                   <a:srgbClr val="8FB3A0"/>
                 </a:solidFill>
@@ -23588,14 +23588,14 @@
               </a:rPr>
               <a:t>/* init: chiamata UNA volta, quando la cartuccia parte. */</a:t>
             </a:r>
-            <a:endParaRPr lang="en-US" sz="1000" dirty="0"/>
+            <a:endParaRPr lang="en-US" sz="1250" dirty="0"/>
           </a:p>
           <a:p>
             <a:pPr indent="0" marL="0">
               <a:buNone/>
             </a:pPr>
             <a:r>
-              <a:rPr lang="en-US" sz="1000" dirty="0">
+              <a:rPr lang="en-US" sz="1250" dirty="0">
                 <a:solidFill>
                   <a:srgbClr val="E6EDF2"/>
                 </a:solidFill>
@@ -23605,14 +23605,14 @@
               </a:rPr>
               <a:t>void breakout_c_init(void) {</a:t>
             </a:r>
-            <a:endParaRPr lang="en-US" sz="1000" dirty="0"/>
+            <a:endParaRPr lang="en-US" sz="1250" dirty="0"/>
           </a:p>
           <a:p>
             <a:pPr indent="0" marL="0">
               <a:buNone/>
             </a:pPr>
             <a:r>
-              <a:rPr lang="en-US" sz="1000" dirty="0">
+              <a:rPr lang="en-US" sz="1250" dirty="0">
                 <a:solidFill>
                   <a:srgbClr val="E6EDF2"/>
                 </a:solidFill>
@@ -23622,14 +23622,14 @@
               </a:rPr>
               <a:t>}</a:t>
             </a:r>
-            <a:endParaRPr lang="en-US" sz="1000" dirty="0"/>
+            <a:endParaRPr lang="en-US" sz="1250" dirty="0"/>
           </a:p>
           <a:p>
             <a:pPr indent="0" marL="0">
               <a:buNone/>
             </a:pPr>
             <a:r>
-              <a:rPr lang="en-US" sz="1000" dirty="0">
+              <a:rPr lang="en-US" sz="1250" dirty="0">
                 <a:solidFill>
                   <a:srgbClr val="E6EDF2"/>
                 </a:solidFill>
@@ -23639,14 +23639,14 @@
               </a:rPr>
               <a:t> </a:t>
             </a:r>
-            <a:endParaRPr lang="en-US" sz="1000" dirty="0"/>
+            <a:endParaRPr lang="en-US" sz="1250" dirty="0"/>
           </a:p>
           <a:p>
             <a:pPr indent="0" marL="0">
               <a:buNone/>
             </a:pPr>
             <a:r>
-              <a:rPr lang="en-US" sz="1000" dirty="0">
+              <a:rPr lang="en-US" sz="1250" dirty="0">
                 <a:solidFill>
                   <a:srgbClr val="8FB3A0"/>
                 </a:solidFill>
@@ -23654,16 +23654,16 @@
                 <a:ea typeface="Courier New" pitchFamily="34" charset="-122"/>
                 <a:cs typeface="Courier New" pitchFamily="34" charset="-120"/>
               </a:rPr>
-              <a:t>/* update: chiamata a OGNI fotogramma. Cambia lo stato, non disegna. */</a:t>
-            </a:r>
-            <a:endParaRPr lang="en-US" sz="1000" dirty="0"/>
+              <a:t>/* update: chiamata a OGNI fotogramma. Cambia lo stato, non</a:t>
+            </a:r>
+            <a:endParaRPr lang="en-US" sz="1250" dirty="0"/>
           </a:p>
           <a:p>
             <a:pPr indent="0" marL="0">
               <a:buNone/>
             </a:pPr>
             <a:r>
-              <a:rPr lang="en-US" sz="1000" dirty="0">
+              <a:rPr lang="en-US" sz="1250" dirty="0">
                 <a:solidFill>
                   <a:srgbClr val="E6EDF2"/>
                 </a:solidFill>
@@ -23671,16 +23671,16 @@
                 <a:ea typeface="Courier New" pitchFamily="34" charset="-122"/>
                 <a:cs typeface="Courier New" pitchFamily="34" charset="-120"/>
               </a:rPr>
-              <a:t>void breakout_c_update(void) {</a:t>
-            </a:r>
-            <a:endParaRPr lang="en-US" sz="1000" dirty="0"/>
+              <a:t>    disegna. */</a:t>
+            </a:r>
+            <a:endParaRPr lang="en-US" sz="1250" dirty="0"/>
           </a:p>
           <a:p>
             <a:pPr indent="0" marL="0">
               <a:buNone/>
             </a:pPr>
             <a:r>
-              <a:rPr lang="en-US" sz="1000" dirty="0">
+              <a:rPr lang="en-US" sz="1250" dirty="0">
                 <a:solidFill>
                   <a:srgbClr val="E6EDF2"/>
                 </a:solidFill>
@@ -23688,16 +23688,16 @@
                 <a:ea typeface="Courier New" pitchFamily="34" charset="-122"/>
                 <a:cs typeface="Courier New" pitchFamily="34" charset="-120"/>
               </a:rPr>
-              <a:t>}</a:t>
-            </a:r>
-            <a:endParaRPr lang="en-US" sz="1000" dirty="0"/>
+              <a:t>void breakout_c_update(void) {</a:t>
+            </a:r>
+            <a:endParaRPr lang="en-US" sz="1250" dirty="0"/>
           </a:p>
           <a:p>
             <a:pPr indent="0" marL="0">
               <a:buNone/>
             </a:pPr>
             <a:r>
-              <a:rPr lang="en-US" sz="1000" dirty="0">
+              <a:rPr lang="en-US" sz="1250" dirty="0">
                 <a:solidFill>
                   <a:srgbClr val="E6EDF2"/>
                 </a:solidFill>
@@ -23705,50 +23705,50 @@
                 <a:ea typeface="Courier New" pitchFamily="34" charset="-122"/>
                 <a:cs typeface="Courier New" pitchFamily="34" charset="-120"/>
               </a:rPr>
-              <a:t> </a:t>
-            </a:r>
-            <a:endParaRPr lang="en-US" sz="1000" dirty="0"/>
+              <a:t>}</a:t>
+            </a:r>
+            <a:endParaRPr lang="en-US" sz="1250" dirty="0"/>
           </a:p>
           <a:p>
             <a:pPr indent="0" marL="0">
               <a:buNone/>
             </a:pPr>
             <a:r>
-              <a:rPr lang="en-US" sz="1000" dirty="0">
-                <a:solidFill>
-                  <a:srgbClr val="8FB3A0"/>
+              <a:rPr lang="en-US" sz="1250" dirty="0">
+                <a:solidFill>
+                  <a:srgbClr val="E6EDF2"/>
                 </a:solidFill>
                 <a:latin typeface="Courier New" pitchFamily="34" charset="0"/>
                 <a:ea typeface="Courier New" pitchFamily="34" charset="-122"/>
                 <a:cs typeface="Courier New" pitchFamily="34" charset="-120"/>
               </a:rPr>
-              <a:t>/* draw: chiamata a OGNI fotogramma. Disegna lo stato, non lo cambia. */</a:t>
-            </a:r>
-            <a:endParaRPr lang="en-US" sz="1000" dirty="0"/>
+              <a:t> </a:t>
+            </a:r>
+            <a:endParaRPr lang="en-US" sz="1250" dirty="0"/>
           </a:p>
           <a:p>
             <a:pPr indent="0" marL="0">
               <a:buNone/>
             </a:pPr>
             <a:r>
-              <a:rPr lang="en-US" sz="1000" dirty="0">
-                <a:solidFill>
-                  <a:srgbClr val="E6EDF2"/>
+              <a:rPr lang="en-US" sz="1250" dirty="0">
+                <a:solidFill>
+                  <a:srgbClr val="8FB3A0"/>
                 </a:solidFill>
                 <a:latin typeface="Courier New" pitchFamily="34" charset="0"/>
                 <a:ea typeface="Courier New" pitchFamily="34" charset="-122"/>
                 <a:cs typeface="Courier New" pitchFamily="34" charset="-120"/>
               </a:rPr>
-              <a:t>void breakout_c_draw(void) {</a:t>
-            </a:r>
-            <a:endParaRPr lang="en-US" sz="1000" dirty="0"/>
+              <a:t>/* draw: chiamata a OGNI fotogramma. Disegna lo stato, non lo</a:t>
+            </a:r>
+            <a:endParaRPr lang="en-US" sz="1250" dirty="0"/>
           </a:p>
           <a:p>
             <a:pPr indent="0" marL="0">
               <a:buNone/>
             </a:pPr>
             <a:r>
-              <a:rPr lang="en-US" sz="1000" dirty="0">
+              <a:rPr lang="en-US" sz="1250" dirty="0">
                 <a:solidFill>
                   <a:srgbClr val="E6EDF2"/>
                 </a:solidFill>
@@ -23756,30 +23756,33 @@
                 <a:ea typeface="Courier New" pitchFamily="34" charset="-122"/>
                 <a:cs typeface="Courier New" pitchFamily="34" charset="-120"/>
               </a:rPr>
-              <a:t>    prg32_gfx_clear(PRG32_COLOR_BLACK); </a:t>
-            </a:r>
+              <a:t>    cambia. */</a:t>
+            </a:r>
+            <a:endParaRPr lang="en-US" sz="1250" dirty="0"/>
+          </a:p>
+          <a:p>
             <a:pPr indent="0" marL="0">
               <a:buNone/>
             </a:pPr>
             <a:r>
-              <a:rPr lang="en-US" sz="1000" dirty="0">
-                <a:solidFill>
-                  <a:srgbClr val="8FB3A0"/>
+              <a:rPr lang="en-US" sz="1250" dirty="0">
+                <a:solidFill>
+                  <a:srgbClr val="E6EDF2"/>
                 </a:solidFill>
                 <a:latin typeface="Courier New" pitchFamily="34" charset="0"/>
                 <a:ea typeface="Courier New" pitchFamily="34" charset="-122"/>
                 <a:cs typeface="Courier New" pitchFamily="34" charset="-120"/>
               </a:rPr>
-              <a:t>/* prima si cancella, poi si disegna */</a:t>
-            </a:r>
-            <a:endParaRPr lang="en-US" sz="1000" dirty="0"/>
+              <a:t>void breakout_c_draw(void) {</a:t>
+            </a:r>
+            <a:endParaRPr lang="en-US" sz="1250" dirty="0"/>
           </a:p>
           <a:p>
             <a:pPr indent="0" marL="0">
               <a:buNone/>
             </a:pPr>
             <a:r>
-              <a:rPr lang="en-US" sz="1000" dirty="0">
+              <a:rPr lang="en-US" sz="1250" dirty="0">
                 <a:solidFill>
                   <a:srgbClr val="E6EDF2"/>
                 </a:solidFill>
@@ -23787,9 +23790,57 @@
                 <a:ea typeface="Courier New" pitchFamily="34" charset="-122"/>
                 <a:cs typeface="Courier New" pitchFamily="34" charset="-120"/>
               </a:rPr>
+              <a:t>    prg32_gfx_clear(PRG32_COLOR_BLACK); </a:t>
+            </a:r>
+            <a:pPr indent="0" marL="0">
+              <a:buNone/>
+            </a:pPr>
+            <a:r>
+              <a:rPr lang="en-US" sz="1250" dirty="0">
+                <a:solidFill>
+                  <a:srgbClr val="8FB3A0"/>
+                </a:solidFill>
+                <a:latin typeface="Courier New" pitchFamily="34" charset="0"/>
+                <a:ea typeface="Courier New" pitchFamily="34" charset="-122"/>
+                <a:cs typeface="Courier New" pitchFamily="34" charset="-120"/>
+              </a:rPr>
+              <a:t>/* prima si cancella, poi</a:t>
+            </a:r>
+            <a:endParaRPr lang="en-US" sz="1250" dirty="0"/>
+          </a:p>
+          <a:p>
+            <a:pPr indent="0" marL="0">
+              <a:buNone/>
+            </a:pPr>
+            <a:r>
+              <a:rPr lang="en-US" sz="1250" dirty="0">
+                <a:solidFill>
+                  <a:srgbClr val="E6EDF2"/>
+                </a:solidFill>
+                <a:latin typeface="Courier New" pitchFamily="34" charset="0"/>
+                <a:ea typeface="Courier New" pitchFamily="34" charset="-122"/>
+                <a:cs typeface="Courier New" pitchFamily="34" charset="-120"/>
+              </a:rPr>
+              <a:t>        si disegna */</a:t>
+            </a:r>
+            <a:endParaRPr lang="en-US" sz="1250" dirty="0"/>
+          </a:p>
+          <a:p>
+            <a:pPr indent="0" marL="0">
+              <a:buNone/>
+            </a:pPr>
+            <a:r>
+              <a:rPr lang="en-US" sz="1250" dirty="0">
+                <a:solidFill>
+                  <a:srgbClr val="E6EDF2"/>
+                </a:solidFill>
+                <a:latin typeface="Courier New" pitchFamily="34" charset="0"/>
+                <a:ea typeface="Courier New" pitchFamily="34" charset="-122"/>
+                <a:cs typeface="Courier New" pitchFamily="34" charset="-120"/>
+              </a:rPr>
               <a:t>}</a:t>
             </a:r>
-            <a:endParaRPr lang="en-US" sz="1000" dirty="0"/>
+            <a:endParaRPr lang="en-US" sz="1250" dirty="0"/>
           </a:p>
         </p:txBody>
       </p:sp>
@@ -24793,7 +24844,7 @@
               <a:buNone/>
             </a:pPr>
             <a:r>
-              <a:rPr lang="en-US" sz="1000" dirty="0">
+              <a:rPr lang="en-US" sz="1250" dirty="0">
                 <a:solidFill>
                   <a:srgbClr val="8FB3A0"/>
                 </a:solidFill>
@@ -24803,14 +24854,14 @@
               </a:rPr>
               <a:t>/* --- Racchetta */</a:t>
             </a:r>
-            <a:endParaRPr lang="en-US" sz="1000" dirty="0"/>
+            <a:endParaRPr lang="en-US" sz="1250" dirty="0"/>
           </a:p>
           <a:p>
             <a:pPr indent="0" marL="0">
               <a:buNone/>
             </a:pPr>
             <a:r>
-              <a:rPr lang="en-US" sz="1000" dirty="0">
+              <a:rPr lang="en-US" sz="1250" dirty="0">
                 <a:solidFill>
                   <a:srgbClr val="E6EDF2"/>
                 </a:solidFill>
@@ -24820,14 +24871,14 @@
               </a:rPr>
               <a:t>#define PADDLE_W 48</a:t>
             </a:r>
-            <a:endParaRPr lang="en-US" sz="1000" dirty="0"/>
+            <a:endParaRPr lang="en-US" sz="1250" dirty="0"/>
           </a:p>
           <a:p>
             <a:pPr indent="0" marL="0">
               <a:buNone/>
             </a:pPr>
             <a:r>
-              <a:rPr lang="en-US" sz="1000" dirty="0">
+              <a:rPr lang="en-US" sz="1250" dirty="0">
                 <a:solidFill>
                   <a:srgbClr val="E6EDF2"/>
                 </a:solidFill>
@@ -24837,14 +24888,14 @@
               </a:rPr>
               <a:t>#define PADDLE_H 6</a:t>
             </a:r>
-            <a:endParaRPr lang="en-US" sz="1000" dirty="0"/>
+            <a:endParaRPr lang="en-US" sz="1250" dirty="0"/>
           </a:p>
           <a:p>
             <a:pPr indent="0" marL="0">
               <a:buNone/>
             </a:pPr>
             <a:r>
-              <a:rPr lang="en-US" sz="1000" dirty="0">
+              <a:rPr lang="en-US" sz="1250" dirty="0">
                 <a:solidFill>
                   <a:srgbClr val="E6EDF2"/>
                 </a:solidFill>
@@ -24854,14 +24905,14 @@
               </a:rPr>
               <a:t>#define PADDLE_Y 188</a:t>
             </a:r>
-            <a:endParaRPr lang="en-US" sz="1000" dirty="0"/>
+            <a:endParaRPr lang="en-US" sz="1250" dirty="0"/>
           </a:p>
           <a:p>
             <a:pPr indent="0" marL="0">
               <a:buNone/>
             </a:pPr>
             <a:r>
-              <a:rPr lang="en-US" sz="1000" dirty="0">
+              <a:rPr lang="en-US" sz="1250" dirty="0">
                 <a:solidFill>
                   <a:srgbClr val="E6EDF2"/>
                 </a:solidFill>
@@ -24871,14 +24922,14 @@
               </a:rPr>
               <a:t> </a:t>
             </a:r>
-            <a:endParaRPr lang="en-US" sz="1000" dirty="0"/>
+            <a:endParaRPr lang="en-US" sz="1250" dirty="0"/>
           </a:p>
           <a:p>
             <a:pPr indent="0" marL="0">
               <a:buNone/>
             </a:pPr>
             <a:r>
-              <a:rPr lang="en-US" sz="1000" dirty="0">
+              <a:rPr lang="en-US" sz="1250" dirty="0">
                 <a:solidFill>
                   <a:srgbClr val="8FB3A0"/>
                 </a:solidFill>
@@ -24886,16 +24937,16 @@
                 <a:ea typeface="Courier New" pitchFamily="34" charset="-122"/>
                 <a:cs typeface="Courier New" pitchFamily="34" charset="-120"/>
               </a:rPr>
-              <a:t>/* --- Lo stato del gioco: variabili che vivono tra un fotogramma e l'altro - */</a:t>
-            </a:r>
-            <a:endParaRPr lang="en-US" sz="1000" dirty="0"/>
+              <a:t>/* --- Lo stato del gioco: variabili che vivono tra un fotogramma</a:t>
+            </a:r>
+            <a:endParaRPr lang="en-US" sz="1250" dirty="0"/>
           </a:p>
           <a:p>
             <a:pPr indent="0" marL="0">
               <a:buNone/>
             </a:pPr>
             <a:r>
-              <a:rPr lang="en-US" sz="1000" dirty="0">
+              <a:rPr lang="en-US" sz="1250" dirty="0">
                 <a:solidFill>
                   <a:srgbClr val="E6EDF2"/>
                 </a:solidFill>
@@ -24903,16 +24954,16 @@
                 <a:ea typeface="Courier New" pitchFamily="34" charset="-122"/>
                 <a:cs typeface="Courier New" pitchFamily="34" charset="-120"/>
               </a:rPr>
-              <a:t>static int paddle_x = 136;</a:t>
-            </a:r>
-            <a:endParaRPr lang="en-US" sz="1000" dirty="0"/>
+              <a:t>    e l'altro - */</a:t>
+            </a:r>
+            <a:endParaRPr lang="en-US" sz="1250" dirty="0"/>
           </a:p>
           <a:p>
             <a:pPr indent="0" marL="0">
               <a:buNone/>
             </a:pPr>
             <a:r>
-              <a:rPr lang="en-US" sz="1000" dirty="0">
+              <a:rPr lang="en-US" sz="1250" dirty="0">
                 <a:solidFill>
                   <a:srgbClr val="E6EDF2"/>
                 </a:solidFill>
@@ -24920,26 +24971,43 @@
                 <a:ea typeface="Courier New" pitchFamily="34" charset="-122"/>
                 <a:cs typeface="Courier New" pitchFamily="34" charset="-120"/>
               </a:rPr>
-              <a:t> </a:t>
-            </a:r>
-            <a:endParaRPr lang="en-US" sz="1000" dirty="0"/>
+              <a:t>static int paddle_x = 136;</a:t>
+            </a:r>
+            <a:endParaRPr lang="en-US" sz="1250" dirty="0"/>
           </a:p>
           <a:p>
             <a:pPr indent="0" marL="0">
               <a:buNone/>
             </a:pPr>
             <a:r>
-              <a:rPr lang="en-US" sz="1000" dirty="0">
-                <a:solidFill>
-                  <a:srgbClr val="8FB3A0"/>
+              <a:rPr lang="en-US" sz="1250" dirty="0">
+                <a:solidFill>
+                  <a:srgbClr val="E6EDF2"/>
                 </a:solidFill>
                 <a:latin typeface="Courier New" pitchFamily="34" charset="0"/>
                 <a:ea typeface="Courier New" pitchFamily="34" charset="-122"/>
                 <a:cs typeface="Courier New" pitchFamily="34" charset="-120"/>
               </a:rPr>
+              <a:t> </a:t>
+            </a:r>
+            <a:endParaRPr lang="en-US" sz="1250" dirty="0"/>
+          </a:p>
+          <a:p>
+            <a:pPr indent="0" marL="0">
+              <a:buNone/>
+            </a:pPr>
+            <a:r>
+              <a:rPr lang="en-US" sz="1250" dirty="0">
+                <a:solidFill>
+                  <a:srgbClr val="8FB3A0"/>
+                </a:solidFill>
+                <a:latin typeface="Courier New" pitchFamily="34" charset="0"/>
+                <a:ea typeface="Courier New" pitchFamily="34" charset="-122"/>
+                <a:cs typeface="Courier New" pitchFamily="34" charset="-120"/>
+              </a:rPr>
               <a:t>/* init: chiamata UNA volta, quando la cartuccia parte. */</a:t>
             </a:r>
-            <a:endParaRPr lang="en-US" sz="1000" dirty="0"/>
+            <a:endParaRPr lang="en-US" sz="1250" dirty="0"/>
           </a:p>
         </p:txBody>
       </p:sp>
@@ -25263,7 +25331,7 @@
               <a:buNone/>
             </a:pPr>
             <a:r>
-              <a:rPr lang="en-US" sz="1050" dirty="0">
+              <a:rPr lang="en-US" sz="1250" dirty="0">
                 <a:solidFill>
                   <a:srgbClr val="8FB3A0"/>
                 </a:solidFill>
@@ -25271,16 +25339,16 @@
                 <a:ea typeface="Courier New" pitchFamily="34" charset="-122"/>
                 <a:cs typeface="Courier New" pitchFamily="34" charset="-120"/>
               </a:rPr>
-              <a:t>/* draw: chiamata a OGNI fotogramma. Disegna lo stato, non lo cambia. */</a:t>
-            </a:r>
-            <a:endParaRPr lang="en-US" sz="1050" dirty="0"/>
+              <a:t>/* draw: chiamata a OGNI fotogramma. Disegna lo stato, non lo</a:t>
+            </a:r>
+            <a:endParaRPr lang="en-US" sz="1250" dirty="0"/>
           </a:p>
           <a:p>
             <a:pPr indent="0" marL="0">
               <a:buNone/>
             </a:pPr>
             <a:r>
-              <a:rPr lang="en-US" sz="1050" dirty="0">
+              <a:rPr lang="en-US" sz="1250" dirty="0">
                 <a:solidFill>
                   <a:srgbClr val="E6EDF2"/>
                 </a:solidFill>
@@ -25288,16 +25356,16 @@
                 <a:ea typeface="Courier New" pitchFamily="34" charset="-122"/>
                 <a:cs typeface="Courier New" pitchFamily="34" charset="-120"/>
               </a:rPr>
-              <a:t>void breakout_c_draw(void) {</a:t>
-            </a:r>
-            <a:endParaRPr lang="en-US" sz="1050" dirty="0"/>
+              <a:t>    cambia. */</a:t>
+            </a:r>
+            <a:endParaRPr lang="en-US" sz="1250" dirty="0"/>
           </a:p>
           <a:p>
             <a:pPr indent="0" marL="0">
               <a:buNone/>
             </a:pPr>
             <a:r>
-              <a:rPr lang="en-US" sz="1050" dirty="0">
+              <a:rPr lang="en-US" sz="1250" dirty="0">
                 <a:solidFill>
                   <a:srgbClr val="E6EDF2"/>
                 </a:solidFill>
@@ -25305,47 +25373,47 @@
                 <a:ea typeface="Courier New" pitchFamily="34" charset="-122"/>
                 <a:cs typeface="Courier New" pitchFamily="34" charset="-120"/>
               </a:rPr>
-              <a:t>    prg32_gfx_clear(PRG32_COLOR_BLACK); </a:t>
-            </a:r>
+              <a:t>void breakout_c_draw(void) {</a:t>
+            </a:r>
+            <a:endParaRPr lang="en-US" sz="1250" dirty="0"/>
+          </a:p>
+          <a:p>
             <a:pPr indent="0" marL="0">
               <a:buNone/>
             </a:pPr>
             <a:r>
-              <a:rPr lang="en-US" sz="1050" dirty="0">
-                <a:solidFill>
-                  <a:srgbClr val="8FB3A0"/>
+              <a:rPr lang="en-US" sz="1250" dirty="0">
+                <a:solidFill>
+                  <a:srgbClr val="E6EDF2"/>
                 </a:solidFill>
                 <a:latin typeface="Courier New" pitchFamily="34" charset="0"/>
                 <a:ea typeface="Courier New" pitchFamily="34" charset="-122"/>
                 <a:cs typeface="Courier New" pitchFamily="34" charset="-120"/>
               </a:rPr>
-              <a:t>/* prima si cancella, poi si disegna */</a:t>
-            </a:r>
-            <a:endParaRPr lang="en-US" sz="1050" dirty="0"/>
-          </a:p>
-          <a:p>
+              <a:t>    prg32_gfx_clear(PRG32_COLOR_BLACK); </a:t>
+            </a:r>
             <a:pPr indent="0" marL="0">
               <a:buNone/>
             </a:pPr>
             <a:r>
-              <a:rPr lang="en-US" sz="1050" dirty="0">
-                <a:solidFill>
-                  <a:srgbClr val="E6EDF2"/>
+              <a:rPr lang="en-US" sz="1250" dirty="0">
+                <a:solidFill>
+                  <a:srgbClr val="8FB3A0"/>
                 </a:solidFill>
                 <a:latin typeface="Courier New" pitchFamily="34" charset="0"/>
                 <a:ea typeface="Courier New" pitchFamily="34" charset="-122"/>
                 <a:cs typeface="Courier New" pitchFamily="34" charset="-120"/>
               </a:rPr>
-              <a:t> </a:t>
-            </a:r>
-            <a:endParaRPr lang="en-US" sz="1050" dirty="0"/>
+              <a:t>/* prima si cancella, poi si</a:t>
+            </a:r>
+            <a:endParaRPr lang="en-US" sz="1250" dirty="0"/>
           </a:p>
           <a:p>
             <a:pPr indent="0" marL="0">
               <a:buNone/>
             </a:pPr>
             <a:r>
-              <a:rPr lang="en-US" sz="1050" dirty="0">
+              <a:rPr lang="en-US" sz="1250" dirty="0">
                 <a:solidFill>
                   <a:srgbClr val="E6EDF2"/>
                 </a:solidFill>
@@ -25353,30 +25421,33 @@
                 <a:ea typeface="Courier New" pitchFamily="34" charset="-122"/>
                 <a:cs typeface="Courier New" pitchFamily="34" charset="-120"/>
               </a:rPr>
-              <a:t>    </a:t>
-            </a:r>
+              <a:t>        disegna */</a:t>
+            </a:r>
+            <a:endParaRPr lang="en-US" sz="1250" dirty="0"/>
+          </a:p>
+          <a:p>
             <a:pPr indent="0" marL="0">
               <a:buNone/>
             </a:pPr>
             <a:r>
-              <a:rPr lang="en-US" sz="1050" dirty="0">
-                <a:solidFill>
-                  <a:srgbClr val="8FB3A0"/>
+              <a:rPr lang="en-US" sz="1250" dirty="0">
+                <a:solidFill>
+                  <a:srgbClr val="E6EDF2"/>
                 </a:solidFill>
                 <a:latin typeface="Courier New" pitchFamily="34" charset="0"/>
                 <a:ea typeface="Courier New" pitchFamily="34" charset="-122"/>
                 <a:cs typeface="Courier New" pitchFamily="34" charset="-120"/>
               </a:rPr>
-              <a:t>/* racchetta: prg32_gfx_rect(x, y, larghezza, altezza, colore) */</a:t>
-            </a:r>
-            <a:endParaRPr lang="en-US" sz="1050" dirty="0"/>
+              <a:t> </a:t>
+            </a:r>
+            <a:endParaRPr lang="en-US" sz="1250" dirty="0"/>
           </a:p>
           <a:p>
             <a:pPr indent="0" marL="0">
               <a:buNone/>
             </a:pPr>
             <a:r>
-              <a:rPr lang="en-US" sz="1050" dirty="0">
+              <a:rPr lang="en-US" sz="1250" dirty="0">
                 <a:solidFill>
                   <a:srgbClr val="E6EDF2"/>
                 </a:solidFill>
@@ -25384,26 +25455,91 @@
                 <a:ea typeface="Courier New" pitchFamily="34" charset="-122"/>
                 <a:cs typeface="Courier New" pitchFamily="34" charset="-120"/>
               </a:rPr>
-              <a:t>    prg32_gfx_rect(paddle_x, PADDLE_Y, PADDLE_W, PADDLE_H, PRG32_COLOR_CYAN);</a:t>
-            </a:r>
-            <a:endParaRPr lang="en-US" sz="1050" dirty="0"/>
-          </a:p>
-          <a:p>
+              <a:t>    </a:t>
+            </a:r>
             <a:pPr indent="0" marL="0">
               <a:buNone/>
             </a:pPr>
             <a:r>
-              <a:rPr lang="en-US" sz="1050" dirty="0">
-                <a:solidFill>
-                  <a:srgbClr val="E6EDF2"/>
+              <a:rPr lang="en-US" sz="1250" dirty="0">
+                <a:solidFill>
+                  <a:srgbClr val="8FB3A0"/>
                 </a:solidFill>
                 <a:latin typeface="Courier New" pitchFamily="34" charset="0"/>
                 <a:ea typeface="Courier New" pitchFamily="34" charset="-122"/>
                 <a:cs typeface="Courier New" pitchFamily="34" charset="-120"/>
               </a:rPr>
+              <a:t>/* racchetta: prg32_gfx_rect(x, y, larghezza, altezza, colore)</a:t>
+            </a:r>
+            <a:endParaRPr lang="en-US" sz="1250" dirty="0"/>
+          </a:p>
+          <a:p>
+            <a:pPr indent="0" marL="0">
+              <a:buNone/>
+            </a:pPr>
+            <a:r>
+              <a:rPr lang="en-US" sz="1250" dirty="0">
+                <a:solidFill>
+                  <a:srgbClr val="E6EDF2"/>
+                </a:solidFill>
+                <a:latin typeface="Courier New" pitchFamily="34" charset="0"/>
+                <a:ea typeface="Courier New" pitchFamily="34" charset="-122"/>
+                <a:cs typeface="Courier New" pitchFamily="34" charset="-120"/>
+              </a:rPr>
+              <a:t>        */</a:t>
+            </a:r>
+            <a:endParaRPr lang="en-US" sz="1250" dirty="0"/>
+          </a:p>
+          <a:p>
+            <a:pPr indent="0" marL="0">
+              <a:buNone/>
+            </a:pPr>
+            <a:r>
+              <a:rPr lang="en-US" sz="1250" dirty="0">
+                <a:solidFill>
+                  <a:srgbClr val="E6EDF2"/>
+                </a:solidFill>
+                <a:latin typeface="Courier New" pitchFamily="34" charset="0"/>
+                <a:ea typeface="Courier New" pitchFamily="34" charset="-122"/>
+                <a:cs typeface="Courier New" pitchFamily="34" charset="-120"/>
+              </a:rPr>
+              <a:t>    prg32_gfx_rect(paddle_x, PADDLE_Y, PADDLE_W, PADDLE_H,</a:t>
+            </a:r>
+            <a:endParaRPr lang="en-US" sz="1250" dirty="0"/>
+          </a:p>
+          <a:p>
+            <a:pPr indent="0" marL="0">
+              <a:buNone/>
+            </a:pPr>
+            <a:r>
+              <a:rPr lang="en-US" sz="1250" dirty="0">
+                <a:solidFill>
+                  <a:srgbClr val="E6EDF2"/>
+                </a:solidFill>
+                <a:latin typeface="Courier New" pitchFamily="34" charset="0"/>
+                <a:ea typeface="Courier New" pitchFamily="34" charset="-122"/>
+                <a:cs typeface="Courier New" pitchFamily="34" charset="-120"/>
+              </a:rPr>
+              <a:t>        PRG32_COLOR_CYAN);</a:t>
+            </a:r>
+            <a:endParaRPr lang="en-US" sz="1250" dirty="0"/>
+          </a:p>
+          <a:p>
+            <a:pPr indent="0" marL="0">
+              <a:buNone/>
+            </a:pPr>
+            <a:r>
+              <a:rPr lang="en-US" sz="1250" dirty="0">
+                <a:solidFill>
+                  <a:srgbClr val="E6EDF2"/>
+                </a:solidFill>
+                <a:latin typeface="Courier New" pitchFamily="34" charset="0"/>
+                <a:ea typeface="Courier New" pitchFamily="34" charset="-122"/>
+                <a:cs typeface="Courier New" pitchFamily="34" charset="-120"/>
+              </a:rPr>
               <a:t>}</a:t>
             </a:r>
-            <a:endParaRPr lang="en-US" sz="1050" dirty="0"/>
+            <a:endParaRPr lang="en-US" sz="1250" dirty="0"/>
           </a:p>
         </p:txBody>
       </p:sp>
@@ -28603,7 +28739,7 @@
               <a:buNone/>
             </a:pPr>
             <a:r>
-              <a:rPr lang="en-US" sz="1100" dirty="0">
+              <a:rPr lang="en-US" sz="1300" dirty="0">
                 <a:solidFill>
                   <a:srgbClr val="E6EDF2"/>
                 </a:solidFill>
@@ -28617,7 +28753,7 @@
               <a:buNone/>
             </a:pPr>
             <a:r>
-              <a:rPr lang="en-US" sz="1100" dirty="0">
+              <a:rPr lang="en-US" sz="1300" dirty="0">
                 <a:solidFill>
                   <a:srgbClr val="8FB3A0"/>
                 </a:solidFill>
@@ -28627,14 +28763,14 @@
               </a:rPr>
               <a:t>/* pallina: posizione = posizione + velocita' */</a:t>
             </a:r>
-            <a:endParaRPr lang="en-US" sz="1100" dirty="0"/>
+            <a:endParaRPr lang="en-US" sz="1300" dirty="0"/>
           </a:p>
           <a:p>
             <a:pPr indent="0" marL="0">
               <a:buNone/>
             </a:pPr>
             <a:r>
-              <a:rPr lang="en-US" sz="1100" dirty="0">
+              <a:rPr lang="en-US" sz="1300" dirty="0">
                 <a:solidFill>
                   <a:srgbClr val="E6EDF2"/>
                 </a:solidFill>
@@ -28644,14 +28780,14 @@
               </a:rPr>
               <a:t>    ball_x += ball_dx;</a:t>
             </a:r>
-            <a:endParaRPr lang="en-US" sz="1100" dirty="0"/>
+            <a:endParaRPr lang="en-US" sz="1300" dirty="0"/>
           </a:p>
           <a:p>
             <a:pPr indent="0" marL="0">
               <a:buNone/>
             </a:pPr>
             <a:r>
-              <a:rPr lang="en-US" sz="1100" dirty="0">
+              <a:rPr lang="en-US" sz="1300" dirty="0">
                 <a:solidFill>
                   <a:srgbClr val="E6EDF2"/>
                 </a:solidFill>
@@ -28661,14 +28797,14 @@
               </a:rPr>
               <a:t>    ball_y += ball_dy;</a:t>
             </a:r>
-            <a:endParaRPr lang="en-US" sz="1100" dirty="0"/>
+            <a:endParaRPr lang="en-US" sz="1300" dirty="0"/>
           </a:p>
           <a:p>
             <a:pPr indent="0" marL="0">
               <a:buNone/>
             </a:pPr>
             <a:r>
-              <a:rPr lang="en-US" sz="1100" dirty="0">
+              <a:rPr lang="en-US" sz="1300" dirty="0">
                 <a:solidFill>
                   <a:srgbClr val="E6EDF2"/>
                 </a:solidFill>
@@ -28682,7 +28818,7 @@
               <a:buNone/>
             </a:pPr>
             <a:r>
-              <a:rPr lang="en-US" sz="1100" dirty="0">
+              <a:rPr lang="en-US" sz="1300" dirty="0">
                 <a:solidFill>
                   <a:srgbClr val="8FB3A0"/>
                 </a:solidFill>
@@ -28692,14 +28828,14 @@
               </a:rPr>
               <a:t>/* muro sinistro */</a:t>
             </a:r>
-            <a:endParaRPr lang="en-US" sz="1100" dirty="0"/>
+            <a:endParaRPr lang="en-US" sz="1300" dirty="0"/>
           </a:p>
           <a:p>
             <a:pPr indent="0" marL="0">
               <a:buNone/>
             </a:pPr>
             <a:r>
-              <a:rPr lang="en-US" sz="1100" dirty="0">
+              <a:rPr lang="en-US" sz="1300" dirty="0">
                 <a:solidFill>
                   <a:srgbClr val="E6EDF2"/>
                 </a:solidFill>
@@ -28709,14 +28845,14 @@
               </a:rPr>
               <a:t>        ball_x = 0;</a:t>
             </a:r>
-            <a:endParaRPr lang="en-US" sz="1100" dirty="0"/>
+            <a:endParaRPr lang="en-US" sz="1300" dirty="0"/>
           </a:p>
           <a:p>
             <a:pPr indent="0" marL="0">
               <a:buNone/>
             </a:pPr>
             <a:r>
-              <a:rPr lang="en-US" sz="1100" dirty="0">
+              <a:rPr lang="en-US" sz="1300" dirty="0">
                 <a:solidFill>
                   <a:srgbClr val="E6EDF2"/>
                 </a:solidFill>
@@ -28726,14 +28862,14 @@
               </a:rPr>
               <a:t>        ball_dx = -ball_dx;</a:t>
             </a:r>
-            <a:endParaRPr lang="en-US" sz="1100" dirty="0"/>
+            <a:endParaRPr lang="en-US" sz="1300" dirty="0"/>
           </a:p>
           <a:p>
             <a:pPr indent="0" marL="0">
               <a:buNone/>
             </a:pPr>
             <a:r>
-              <a:rPr lang="en-US" sz="1100" dirty="0">
+              <a:rPr lang="en-US" sz="1300" dirty="0">
                 <a:solidFill>
                   <a:srgbClr val="E6EDF2"/>
                 </a:solidFill>
@@ -28743,14 +28879,14 @@
               </a:rPr>
               <a:t>    }</a:t>
             </a:r>
-            <a:endParaRPr lang="en-US" sz="1100" dirty="0"/>
+            <a:endParaRPr lang="en-US" sz="1300" dirty="0"/>
           </a:p>
           <a:p>
             <a:pPr indent="0" marL="0">
               <a:buNone/>
             </a:pPr>
             <a:r>
-              <a:rPr lang="en-US" sz="1100" dirty="0">
+              <a:rPr lang="en-US" sz="1300" dirty="0">
                 <a:solidFill>
                   <a:srgbClr val="E6EDF2"/>
                 </a:solidFill>
@@ -28764,7 +28900,7 @@
               <a:buNone/>
             </a:pPr>
             <a:r>
-              <a:rPr lang="en-US" sz="1100" dirty="0">
+              <a:rPr lang="en-US" sz="1300" dirty="0">
                 <a:solidFill>
                   <a:srgbClr val="8FB3A0"/>
                 </a:solidFill>
@@ -28774,14 +28910,14 @@
               </a:rPr>
               <a:t>/* muro destro */</a:t>
             </a:r>
-            <a:endParaRPr lang="en-US" sz="1100" dirty="0"/>
+            <a:endParaRPr lang="en-US" sz="1300" dirty="0"/>
           </a:p>
           <a:p>
             <a:pPr indent="0" marL="0">
               <a:buNone/>
             </a:pPr>
             <a:r>
-              <a:rPr lang="en-US" sz="1100" dirty="0">
+              <a:rPr lang="en-US" sz="1300" dirty="0">
                 <a:solidFill>
                   <a:srgbClr val="E6EDF2"/>
                 </a:solidFill>
@@ -28791,14 +28927,14 @@
               </a:rPr>
               <a:t>        ball_x = PRG32_GAME_W - BALL_SIZE;</a:t>
             </a:r>
-            <a:endParaRPr lang="en-US" sz="1100" dirty="0"/>
+            <a:endParaRPr lang="en-US" sz="1300" dirty="0"/>
           </a:p>
           <a:p>
             <a:pPr indent="0" marL="0">
               <a:buNone/>
             </a:pPr>
             <a:r>
-              <a:rPr lang="en-US" sz="1100" dirty="0">
+              <a:rPr lang="en-US" sz="1300" dirty="0">
                 <a:solidFill>
                   <a:srgbClr val="E6EDF2"/>
                 </a:solidFill>
@@ -28808,14 +28944,14 @@
               </a:rPr>
               <a:t>        ball_dx = -ball_dx;</a:t>
             </a:r>
-            <a:endParaRPr lang="en-US" sz="1100" dirty="0"/>
+            <a:endParaRPr lang="en-US" sz="1300" dirty="0"/>
           </a:p>
           <a:p>
             <a:pPr indent="0" marL="0">
               <a:buNone/>
             </a:pPr>
             <a:r>
-              <a:rPr lang="en-US" sz="1100" dirty="0">
+              <a:rPr lang="en-US" sz="1300" dirty="0">
                 <a:solidFill>
                   <a:srgbClr val="E6EDF2"/>
                 </a:solidFill>
@@ -28825,14 +28961,14 @@
               </a:rPr>
               <a:t>    }</a:t>
             </a:r>
-            <a:endParaRPr lang="en-US" sz="1100" dirty="0"/>
+            <a:endParaRPr lang="en-US" sz="1300" dirty="0"/>
           </a:p>
           <a:p>
             <a:pPr indent="0" marL="0">
               <a:buNone/>
             </a:pPr>
             <a:r>
-              <a:rPr lang="en-US" sz="1100" dirty="0">
+              <a:rPr lang="en-US" sz="1300" dirty="0">
                 <a:solidFill>
                   <a:srgbClr val="E6EDF2"/>
                 </a:solidFill>
@@ -28846,7 +28982,7 @@
               <a:buNone/>
             </a:pPr>
             <a:r>
-              <a:rPr lang="en-US" sz="1100" dirty="0">
+              <a:rPr lang="en-US" sz="1300" dirty="0">
                 <a:solidFill>
                   <a:srgbClr val="8FB3A0"/>
                 </a:solidFill>
@@ -28856,14 +28992,14 @@
               </a:rPr>
               <a:t>/* soffitto */</a:t>
             </a:r>
-            <a:endParaRPr lang="en-US" sz="1100" dirty="0"/>
+            <a:endParaRPr lang="en-US" sz="1300" dirty="0"/>
           </a:p>
           <a:p>
             <a:pPr indent="0" marL="0">
               <a:buNone/>
             </a:pPr>
             <a:r>
-              <a:rPr lang="en-US" sz="1100" dirty="0">
+              <a:rPr lang="en-US" sz="1300" dirty="0">
                 <a:solidFill>
                   <a:srgbClr val="E6EDF2"/>
                 </a:solidFill>
@@ -28873,14 +29009,14 @@
               </a:rPr>
               <a:t>        ball_y = 0;</a:t>
             </a:r>
-            <a:endParaRPr lang="en-US" sz="1100" dirty="0"/>
+            <a:endParaRPr lang="en-US" sz="1300" dirty="0"/>
           </a:p>
           <a:p>
             <a:pPr indent="0" marL="0">
               <a:buNone/>
             </a:pPr>
             <a:r>
-              <a:rPr lang="en-US" sz="1100" dirty="0">
+              <a:rPr lang="en-US" sz="1300" dirty="0">
                 <a:solidFill>
                   <a:srgbClr val="E6EDF2"/>
                 </a:solidFill>
@@ -28890,14 +29026,14 @@
               </a:rPr>
               <a:t>        ball_dy = -ball_dy;</a:t>
             </a:r>
-            <a:endParaRPr lang="en-US" sz="1100" dirty="0"/>
+            <a:endParaRPr lang="en-US" sz="1300" dirty="0"/>
           </a:p>
           <a:p>
             <a:pPr indent="0" marL="0">
               <a:buNone/>
             </a:pPr>
             <a:r>
-              <a:rPr lang="en-US" sz="1100" dirty="0">
+              <a:rPr lang="en-US" sz="1300" dirty="0">
                 <a:solidFill>
                   <a:srgbClr val="E6EDF2"/>
                 </a:solidFill>
@@ -28907,14 +29043,14 @@
               </a:rPr>
               <a:t>    }</a:t>
             </a:r>
-            <a:endParaRPr lang="en-US" sz="1100" dirty="0"/>
+            <a:endParaRPr lang="en-US" sz="1300" dirty="0"/>
           </a:p>
           <a:p>
             <a:pPr indent="0" marL="0">
               <a:buNone/>
             </a:pPr>
             <a:r>
-              <a:rPr lang="en-US" sz="1100" dirty="0">
+              <a:rPr lang="en-US" sz="1300" dirty="0">
                 <a:solidFill>
                   <a:srgbClr val="E6EDF2"/>
                 </a:solidFill>
@@ -28928,7 +29064,7 @@
               <a:buNone/>
             </a:pPr>
             <a:r>
-              <a:rPr lang="en-US" sz="1100" dirty="0">
+              <a:rPr lang="en-US" sz="1300" dirty="0">
                 <a:solidFill>
                   <a:srgbClr val="8FB3A0"/>
                 </a:solidFill>
@@ -28936,16 +29072,16 @@
                 <a:ea typeface="Courier New" pitchFamily="34" charset="-122"/>
                 <a:cs typeface="Courier New" pitchFamily="34" charset="-120"/>
               </a:rPr>
-              <a:t>/* persa: si ricomincia dal centro */</a:t>
-            </a:r>
-            <a:endParaRPr lang="en-US" sz="1100" dirty="0"/>
+              <a:t>/* persa: si ricomincia dal</a:t>
+            </a:r>
+            <a:endParaRPr lang="en-US" sz="1300" dirty="0"/>
           </a:p>
           <a:p>
             <a:pPr indent="0" marL="0">
               <a:buNone/>
             </a:pPr>
             <a:r>
-              <a:rPr lang="en-US" sz="1100" dirty="0">
+              <a:rPr lang="en-US" sz="1300" dirty="0">
                 <a:solidFill>
                   <a:srgbClr val="E6EDF2"/>
                 </a:solidFill>
@@ -28953,16 +29089,16 @@
                 <a:ea typeface="Courier New" pitchFamily="34" charset="-122"/>
                 <a:cs typeface="Courier New" pitchFamily="34" charset="-120"/>
               </a:rPr>
-              <a:t>        reset_ball();</a:t>
-            </a:r>
-            <a:endParaRPr lang="en-US" sz="1100" dirty="0"/>
+              <a:t>        centro */</a:t>
+            </a:r>
+            <a:endParaRPr lang="en-US" sz="1300" dirty="0"/>
           </a:p>
           <a:p>
             <a:pPr indent="0" marL="0">
               <a:buNone/>
             </a:pPr>
             <a:r>
-              <a:rPr lang="en-US" sz="1100" dirty="0">
+              <a:rPr lang="en-US" sz="1300" dirty="0">
                 <a:solidFill>
                   <a:srgbClr val="E6EDF2"/>
                 </a:solidFill>
@@ -28970,16 +29106,16 @@
                 <a:ea typeface="Courier New" pitchFamily="34" charset="-122"/>
                 <a:cs typeface="Courier New" pitchFamily="34" charset="-120"/>
               </a:rPr>
-              <a:t>    }</a:t>
-            </a:r>
-            <a:endParaRPr lang="en-US" sz="1100" dirty="0"/>
+              <a:t>        reset_ball();</a:t>
+            </a:r>
+            <a:endParaRPr lang="en-US" sz="1300" dirty="0"/>
           </a:p>
           <a:p>
             <a:pPr indent="0" marL="0">
               <a:buNone/>
             </a:pPr>
             <a:r>
-              <a:rPr lang="en-US" sz="1100" dirty="0">
+              <a:rPr lang="en-US" sz="1300" dirty="0">
                 <a:solidFill>
                   <a:srgbClr val="E6EDF2"/>
                 </a:solidFill>
@@ -28987,9 +29123,26 @@
                 <a:ea typeface="Courier New" pitchFamily="34" charset="-122"/>
                 <a:cs typeface="Courier New" pitchFamily="34" charset="-120"/>
               </a:rPr>
+              <a:t>    }</a:t>
+            </a:r>
+            <a:endParaRPr lang="en-US" sz="1300" dirty="0"/>
+          </a:p>
+          <a:p>
+            <a:pPr indent="0" marL="0">
+              <a:buNone/>
+            </a:pPr>
+            <a:r>
+              <a:rPr lang="en-US" sz="1300" dirty="0">
+                <a:solidFill>
+                  <a:srgbClr val="E6EDF2"/>
+                </a:solidFill>
+                <a:latin typeface="Courier New" pitchFamily="34" charset="0"/>
+                <a:ea typeface="Courier New" pitchFamily="34" charset="-122"/>
+                <a:cs typeface="Courier New" pitchFamily="34" charset="-120"/>
+              </a:rPr>
               <a:t>}</a:t>
             </a:r>
-            <a:endParaRPr lang="en-US" sz="1100" dirty="0"/>
+            <a:endParaRPr lang="en-US" sz="1300" dirty="0"/>
           </a:p>
         </p:txBody>
       </p:sp>
@@ -29993,7 +30146,7 @@
               <a:buNone/>
             </a:pPr>
             <a:r>
-              <a:rPr lang="en-US" sz="1100" dirty="0">
+              <a:rPr lang="en-US" sz="1250" dirty="0">
                 <a:solidFill>
                   <a:srgbClr val="E6EDF2"/>
                 </a:solidFill>
@@ -30007,7 +30160,7 @@
               <a:buNone/>
             </a:pPr>
             <a:r>
-              <a:rPr lang="en-US" sz="1100" dirty="0">
+              <a:rPr lang="en-US" sz="1250" dirty="0">
                 <a:solidFill>
                   <a:srgbClr val="8FB3A0"/>
                 </a:solidFill>
@@ -30015,16 +30168,16 @@
                 <a:ea typeface="Courier New" pitchFamily="34" charset="-122"/>
                 <a:cs typeface="Courier New" pitchFamily="34" charset="-120"/>
               </a:rPr>
-              <a:t>/* la pallina tocca la racchetta? Rimbalza solo se sta scendendo. */</a:t>
-            </a:r>
-            <a:endParaRPr lang="en-US" sz="1100" dirty="0"/>
+              <a:t>/* la pallina tocca la racchetta? Rimbalza solo se sta</a:t>
+            </a:r>
+            <a:endParaRPr lang="en-US" sz="1250" dirty="0"/>
           </a:p>
           <a:p>
             <a:pPr indent="0" marL="0">
               <a:buNone/>
             </a:pPr>
             <a:r>
-              <a:rPr lang="en-US" sz="1100" dirty="0">
+              <a:rPr lang="en-US" sz="1250" dirty="0">
                 <a:solidFill>
                   <a:srgbClr val="E6EDF2"/>
                 </a:solidFill>
@@ -30032,16 +30185,16 @@
                 <a:ea typeface="Courier New" pitchFamily="34" charset="-122"/>
                 <a:cs typeface="Courier New" pitchFamily="34" charset="-120"/>
               </a:rPr>
-              <a:t>    if (ball_dy &gt; 0 &amp;&amp;</a:t>
-            </a:r>
-            <a:endParaRPr lang="en-US" sz="1100" dirty="0"/>
+              <a:t>        scendendo. */</a:t>
+            </a:r>
+            <a:endParaRPr lang="en-US" sz="1250" dirty="0"/>
           </a:p>
           <a:p>
             <a:pPr indent="0" marL="0">
               <a:buNone/>
             </a:pPr>
             <a:r>
-              <a:rPr lang="en-US" sz="1100" dirty="0">
+              <a:rPr lang="en-US" sz="1250" dirty="0">
                 <a:solidFill>
                   <a:srgbClr val="E6EDF2"/>
                 </a:solidFill>
@@ -30049,16 +30202,16 @@
                 <a:ea typeface="Courier New" pitchFamily="34" charset="-122"/>
                 <a:cs typeface="Courier New" pitchFamily="34" charset="-120"/>
               </a:rPr>
-              <a:t>        prg32_sprite_hitbox(ball_x, ball_y, BALL_SIZE, BALL_SIZE,</a:t>
-            </a:r>
-            <a:endParaRPr lang="en-US" sz="1100" dirty="0"/>
+              <a:t>    if (ball_dy &gt; 0 &amp;&amp;</a:t>
+            </a:r>
+            <a:endParaRPr lang="en-US" sz="1250" dirty="0"/>
           </a:p>
           <a:p>
             <a:pPr indent="0" marL="0">
               <a:buNone/>
             </a:pPr>
             <a:r>
-              <a:rPr lang="en-US" sz="1100" dirty="0">
+              <a:rPr lang="en-US" sz="1250" dirty="0">
                 <a:solidFill>
                   <a:srgbClr val="E6EDF2"/>
                 </a:solidFill>
@@ -30066,16 +30219,16 @@
                 <a:ea typeface="Courier New" pitchFamily="34" charset="-122"/>
                 <a:cs typeface="Courier New" pitchFamily="34" charset="-120"/>
               </a:rPr>
-              <a:t>                            paddle_x, PADDLE_Y, PADDLE_W, PADDLE_H)) {</a:t>
-            </a:r>
-            <a:endParaRPr lang="en-US" sz="1100" dirty="0"/>
+              <a:t>        prg32_sprite_hitbox(ball_x, ball_y, BALL_SIZE, BALL_SIZE,</a:t>
+            </a:r>
+            <a:endParaRPr lang="en-US" sz="1250" dirty="0"/>
           </a:p>
           <a:p>
             <a:pPr indent="0" marL="0">
               <a:buNone/>
             </a:pPr>
             <a:r>
-              <a:rPr lang="en-US" sz="1100" dirty="0">
+              <a:rPr lang="en-US" sz="1250" dirty="0">
                 <a:solidFill>
                   <a:srgbClr val="E6EDF2"/>
                 </a:solidFill>
@@ -30083,16 +30236,16 @@
                 <a:ea typeface="Courier New" pitchFamily="34" charset="-122"/>
                 <a:cs typeface="Courier New" pitchFamily="34" charset="-120"/>
               </a:rPr>
-              <a:t>        ball_dy = -ball_dy;</a:t>
-            </a:r>
-            <a:endParaRPr lang="en-US" sz="1100" dirty="0"/>
+              <a:t>                            paddle_x, PADDLE_Y, PADDLE_W,</a:t>
+            </a:r>
+            <a:endParaRPr lang="en-US" sz="1250" dirty="0"/>
           </a:p>
           <a:p>
             <a:pPr indent="0" marL="0">
               <a:buNone/>
             </a:pPr>
             <a:r>
-              <a:rPr lang="en-US" sz="1100" dirty="0">
+              <a:rPr lang="en-US" sz="1250" dirty="0">
                 <a:solidFill>
                   <a:srgbClr val="E6EDF2"/>
                 </a:solidFill>
@@ -30100,16 +30253,16 @@
                 <a:ea typeface="Courier New" pitchFamily="34" charset="-122"/>
                 <a:cs typeface="Courier New" pitchFamily="34" charset="-120"/>
               </a:rPr>
-              <a:t>    }</a:t>
-            </a:r>
-            <a:endParaRPr lang="en-US" sz="1100" dirty="0"/>
+              <a:t>                                PADDLE_H)) {</a:t>
+            </a:r>
+            <a:endParaRPr lang="en-US" sz="1250" dirty="0"/>
           </a:p>
           <a:p>
             <a:pPr indent="0" marL="0">
               <a:buNone/>
             </a:pPr>
             <a:r>
-              <a:rPr lang="en-US" sz="1100" dirty="0">
+              <a:rPr lang="en-US" sz="1250" dirty="0">
                 <a:solidFill>
                   <a:srgbClr val="E6EDF2"/>
                 </a:solidFill>
@@ -30117,9 +30270,43 @@
                 <a:ea typeface="Courier New" pitchFamily="34" charset="-122"/>
                 <a:cs typeface="Courier New" pitchFamily="34" charset="-120"/>
               </a:rPr>
+              <a:t>        ball_dy = -ball_dy;</a:t>
+            </a:r>
+            <a:endParaRPr lang="en-US" sz="1250" dirty="0"/>
+          </a:p>
+          <a:p>
+            <a:pPr indent="0" marL="0">
+              <a:buNone/>
+            </a:pPr>
+            <a:r>
+              <a:rPr lang="en-US" sz="1250" dirty="0">
+                <a:solidFill>
+                  <a:srgbClr val="E6EDF2"/>
+                </a:solidFill>
+                <a:latin typeface="Courier New" pitchFamily="34" charset="0"/>
+                <a:ea typeface="Courier New" pitchFamily="34" charset="-122"/>
+                <a:cs typeface="Courier New" pitchFamily="34" charset="-120"/>
+              </a:rPr>
+              <a:t>    }</a:t>
+            </a:r>
+            <a:endParaRPr lang="en-US" sz="1250" dirty="0"/>
+          </a:p>
+          <a:p>
+            <a:pPr indent="0" marL="0">
+              <a:buNone/>
+            </a:pPr>
+            <a:r>
+              <a:rPr lang="en-US" sz="1250" dirty="0">
+                <a:solidFill>
+                  <a:srgbClr val="E6EDF2"/>
+                </a:solidFill>
+                <a:latin typeface="Courier New" pitchFamily="34" charset="0"/>
+                <a:ea typeface="Courier New" pitchFamily="34" charset="-122"/>
+                <a:cs typeface="Courier New" pitchFamily="34" charset="-120"/>
+              </a:rPr>
               <a:t>}</a:t>
             </a:r>
-            <a:endParaRPr lang="en-US" sz="1100" dirty="0"/>
+            <a:endParaRPr lang="en-US" sz="1250" dirty="0"/>
           </a:p>
         </p:txBody>
       </p:sp>
@@ -31581,7 +31768,7 @@
               <a:buNone/>
             </a:pPr>
             <a:r>
-              <a:rPr lang="en-US" sz="1000" dirty="0">
+              <a:rPr lang="en-US" sz="1250" dirty="0">
                 <a:solidFill>
                   <a:srgbClr val="8FB3A0"/>
                 </a:solidFill>
@@ -31591,14 +31778,14 @@
               </a:rPr>
               <a:t>/* Dove si trova il mattoncino numero i? */</a:t>
             </a:r>
-            <a:endParaRPr lang="en-US" sz="1000" dirty="0"/>
+            <a:endParaRPr lang="en-US" sz="1250" dirty="0"/>
           </a:p>
           <a:p>
             <a:pPr indent="0" marL="0">
               <a:buNone/>
             </a:pPr>
             <a:r>
-              <a:rPr lang="en-US" sz="1000" dirty="0">
+              <a:rPr lang="en-US" sz="1250" dirty="0">
                 <a:solidFill>
                   <a:srgbClr val="E6EDF2"/>
                 </a:solidFill>
@@ -31606,16 +31793,16 @@
                 <a:ea typeface="Courier New" pitchFamily="34" charset="-122"/>
                 <a:cs typeface="Courier New" pitchFamily="34" charset="-120"/>
               </a:rPr>
-              <a:t>static int brick_x(int i) { return 2 + (i % BRICK_COLS) * BRICK_PITCH_X; }</a:t>
-            </a:r>
-            <a:endParaRPr lang="en-US" sz="1000" dirty="0"/>
+              <a:t>static int brick_x(int i) { return 2 + (i % BRICK_COLS) *</a:t>
+            </a:r>
+            <a:endParaRPr lang="en-US" sz="1250" dirty="0"/>
           </a:p>
           <a:p>
             <a:pPr indent="0" marL="0">
               <a:buNone/>
             </a:pPr>
             <a:r>
-              <a:rPr lang="en-US" sz="1000" dirty="0">
+              <a:rPr lang="en-US" sz="1250" dirty="0">
                 <a:solidFill>
                   <a:srgbClr val="E6EDF2"/>
                 </a:solidFill>
@@ -31623,16 +31810,16 @@
                 <a:ea typeface="Courier New" pitchFamily="34" charset="-122"/>
                 <a:cs typeface="Courier New" pitchFamily="34" charset="-120"/>
               </a:rPr>
-              <a:t>static int brick_y(int i) { return BRICK_TOP + (i / BRICK_COLS) * BRICK_PITCH_Y;</a:t>
-            </a:r>
-            <a:endParaRPr lang="en-US" sz="1000" dirty="0"/>
+              <a:t>    BRICK_PITCH_X; }</a:t>
+            </a:r>
+            <a:endParaRPr lang="en-US" sz="1250" dirty="0"/>
           </a:p>
           <a:p>
             <a:pPr indent="0" marL="0">
               <a:buNone/>
             </a:pPr>
             <a:r>
-              <a:rPr lang="en-US" sz="1000" dirty="0">
+              <a:rPr lang="en-US" sz="1250" dirty="0">
                 <a:solidFill>
                   <a:srgbClr val="E6EDF2"/>
                 </a:solidFill>
@@ -31640,9 +31827,26 @@
                 <a:ea typeface="Courier New" pitchFamily="34" charset="-122"/>
                 <a:cs typeface="Courier New" pitchFamily="34" charset="-120"/>
               </a:rPr>
-              <a:t>    }</a:t>
-            </a:r>
-            <a:endParaRPr lang="en-US" sz="1000" dirty="0"/>
+              <a:t>static int brick_y(int i) { return BRICK_TOP + (i / BRICK_COLS) *</a:t>
+            </a:r>
+            <a:endParaRPr lang="en-US" sz="1250" dirty="0"/>
+          </a:p>
+          <a:p>
+            <a:pPr indent="0" marL="0">
+              <a:buNone/>
+            </a:pPr>
+            <a:r>
+              <a:rPr lang="en-US" sz="1250" dirty="0">
+                <a:solidFill>
+                  <a:srgbClr val="E6EDF2"/>
+                </a:solidFill>
+                <a:latin typeface="Courier New" pitchFamily="34" charset="0"/>
+                <a:ea typeface="Courier New" pitchFamily="34" charset="-122"/>
+                <a:cs typeface="Courier New" pitchFamily="34" charset="-120"/>
+              </a:rPr>
+              <a:t>    BRICK_PITCH_Y; }</a:t>
+            </a:r>
+            <a:endParaRPr lang="en-US" sz="1250" dirty="0"/>
           </a:p>
         </p:txBody>
       </p:sp>
@@ -31966,7 +32170,7 @@
               <a:buNone/>
             </a:pPr>
             <a:r>
-              <a:rPr lang="en-US" sz="1000" dirty="0">
+              <a:rPr lang="en-US" sz="1250" dirty="0">
                 <a:solidFill>
                   <a:srgbClr val="E6EDF2"/>
                 </a:solidFill>
@@ -31980,7 +32184,7 @@
               <a:buNone/>
             </a:pPr>
             <a:r>
-              <a:rPr lang="en-US" sz="1000" dirty="0">
+              <a:rPr lang="en-US" sz="1250" dirty="0">
                 <a:solidFill>
                   <a:srgbClr val="8FB3A0"/>
                 </a:solidFill>
@@ -31988,16 +32192,16 @@
                 <a:ea typeface="Courier New" pitchFamily="34" charset="-122"/>
                 <a:cs typeface="Courier New" pitchFamily="34" charset="-120"/>
               </a:rPr>
-              <a:t>/* prima si cancella, poi si disegna */</a:t>
-            </a:r>
-            <a:endParaRPr lang="en-US" sz="1000" dirty="0"/>
+              <a:t>/* prima si cancella, poi si</a:t>
+            </a:r>
+            <a:endParaRPr lang="en-US" sz="1250" dirty="0"/>
           </a:p>
           <a:p>
             <a:pPr indent="0" marL="0">
               <a:buNone/>
             </a:pPr>
             <a:r>
-              <a:rPr lang="en-US" sz="1000" dirty="0">
+              <a:rPr lang="en-US" sz="1250" dirty="0">
                 <a:solidFill>
                   <a:srgbClr val="E6EDF2"/>
                 </a:solidFill>
@@ -32005,16 +32209,16 @@
                 <a:ea typeface="Courier New" pitchFamily="34" charset="-122"/>
                 <a:cs typeface="Courier New" pitchFamily="34" charset="-120"/>
               </a:rPr>
-              <a:t> </a:t>
-            </a:r>
-            <a:endParaRPr lang="en-US" sz="1000" dirty="0"/>
+              <a:t>        disegna */</a:t>
+            </a:r>
+            <a:endParaRPr lang="en-US" sz="1250" dirty="0"/>
           </a:p>
           <a:p>
             <a:pPr indent="0" marL="0">
               <a:buNone/>
             </a:pPr>
             <a:r>
-              <a:rPr lang="en-US" sz="1000" dirty="0">
+              <a:rPr lang="en-US" sz="1250" dirty="0">
                 <a:solidFill>
                   <a:srgbClr val="E6EDF2"/>
                 </a:solidFill>
@@ -32022,16 +32226,16 @@
                 <a:ea typeface="Courier New" pitchFamily="34" charset="-122"/>
                 <a:cs typeface="Courier New" pitchFamily="34" charset="-120"/>
               </a:rPr>
-              <a:t>    for (int i = 0; i &lt; BRICK_COUNT; i++) {</a:t>
-            </a:r>
-            <a:endParaRPr lang="en-US" sz="1000" dirty="0"/>
+              <a:t> </a:t>
+            </a:r>
+            <a:endParaRPr lang="en-US" sz="1250" dirty="0"/>
           </a:p>
           <a:p>
             <a:pPr indent="0" marL="0">
               <a:buNone/>
             </a:pPr>
             <a:r>
-              <a:rPr lang="en-US" sz="1000" dirty="0">
+              <a:rPr lang="en-US" sz="1250" dirty="0">
                 <a:solidFill>
                   <a:srgbClr val="E6EDF2"/>
                 </a:solidFill>
@@ -32039,16 +32243,16 @@
                 <a:ea typeface="Courier New" pitchFamily="34" charset="-122"/>
                 <a:cs typeface="Courier New" pitchFamily="34" charset="-120"/>
               </a:rPr>
-              <a:t>        if (bricks[i]) {</a:t>
-            </a:r>
-            <a:endParaRPr lang="en-US" sz="1000" dirty="0"/>
+              <a:t>    for (int i = 0; i &lt; BRICK_COUNT; i++) {</a:t>
+            </a:r>
+            <a:endParaRPr lang="en-US" sz="1250" dirty="0"/>
           </a:p>
           <a:p>
             <a:pPr indent="0" marL="0">
               <a:buNone/>
             </a:pPr>
             <a:r>
-              <a:rPr lang="en-US" sz="1000" dirty="0">
+              <a:rPr lang="en-US" sz="1250" dirty="0">
                 <a:solidFill>
                   <a:srgbClr val="E6EDF2"/>
                 </a:solidFill>
@@ -32056,16 +32260,16 @@
                 <a:ea typeface="Courier New" pitchFamily="34" charset="-122"/>
                 <a:cs typeface="Courier New" pitchFamily="34" charset="-120"/>
               </a:rPr>
-              <a:t>            uint16_t color = (i &lt; BRICK_COLS) ? PRG32_COLOR_RED : PRG32_COLOR_YELLOW;</a:t>
-            </a:r>
-            <a:endParaRPr lang="en-US" sz="1000" dirty="0"/>
+              <a:t>        if (bricks[i]) {</a:t>
+            </a:r>
+            <a:endParaRPr lang="en-US" sz="1250" dirty="0"/>
           </a:p>
           <a:p>
             <a:pPr indent="0" marL="0">
               <a:buNone/>
             </a:pPr>
             <a:r>
-              <a:rPr lang="en-US" sz="1000" dirty="0">
+              <a:rPr lang="en-US" sz="1250" dirty="0">
                 <a:solidFill>
                   <a:srgbClr val="E6EDF2"/>
                 </a:solidFill>
@@ -32073,16 +32277,16 @@
                 <a:ea typeface="Courier New" pitchFamily="34" charset="-122"/>
                 <a:cs typeface="Courier New" pitchFamily="34" charset="-120"/>
               </a:rPr>
-              <a:t>            prg32_gfx_rect(brick_x(i), brick_y(i), BRICK_W, BRICK_H, color);</a:t>
-            </a:r>
-            <a:endParaRPr lang="en-US" sz="1000" dirty="0"/>
+              <a:t>            uint16_t color = (i &lt; BRICK_COLS) ? PRG32_COLOR_RED :</a:t>
+            </a:r>
+            <a:endParaRPr lang="en-US" sz="1250" dirty="0"/>
           </a:p>
           <a:p>
             <a:pPr indent="0" marL="0">
               <a:buNone/>
             </a:pPr>
             <a:r>
-              <a:rPr lang="en-US" sz="1000" dirty="0">
+              <a:rPr lang="en-US" sz="1250" dirty="0">
                 <a:solidFill>
                   <a:srgbClr val="E6EDF2"/>
                 </a:solidFill>
@@ -32090,16 +32294,16 @@
                 <a:ea typeface="Courier New" pitchFamily="34" charset="-122"/>
                 <a:cs typeface="Courier New" pitchFamily="34" charset="-120"/>
               </a:rPr>
-              <a:t>        }</a:t>
-            </a:r>
-            <a:endParaRPr lang="en-US" sz="1000" dirty="0"/>
+              <a:t>                PRG32_COLOR_YELLOW;</a:t>
+            </a:r>
+            <a:endParaRPr lang="en-US" sz="1250" dirty="0"/>
           </a:p>
           <a:p>
             <a:pPr indent="0" marL="0">
               <a:buNone/>
             </a:pPr>
             <a:r>
-              <a:rPr lang="en-US" sz="1000" dirty="0">
+              <a:rPr lang="en-US" sz="1250" dirty="0">
                 <a:solidFill>
                   <a:srgbClr val="E6EDF2"/>
                 </a:solidFill>
@@ -32107,9 +32311,60 @@
                 <a:ea typeface="Courier New" pitchFamily="34" charset="-122"/>
                 <a:cs typeface="Courier New" pitchFamily="34" charset="-120"/>
               </a:rPr>
+              <a:t>            prg32_gfx_rect(brick_x(i), brick_y(i), BRICK_W, BRICK_H,</a:t>
+            </a:r>
+            <a:endParaRPr lang="en-US" sz="1250" dirty="0"/>
+          </a:p>
+          <a:p>
+            <a:pPr indent="0" marL="0">
+              <a:buNone/>
+            </a:pPr>
+            <a:r>
+              <a:rPr lang="en-US" sz="1250" dirty="0">
+                <a:solidFill>
+                  <a:srgbClr val="E6EDF2"/>
+                </a:solidFill>
+                <a:latin typeface="Courier New" pitchFamily="34" charset="0"/>
+                <a:ea typeface="Courier New" pitchFamily="34" charset="-122"/>
+                <a:cs typeface="Courier New" pitchFamily="34" charset="-120"/>
+              </a:rPr>
+              <a:t>                color);</a:t>
+            </a:r>
+            <a:endParaRPr lang="en-US" sz="1250" dirty="0"/>
+          </a:p>
+          <a:p>
+            <a:pPr indent="0" marL="0">
+              <a:buNone/>
+            </a:pPr>
+            <a:r>
+              <a:rPr lang="en-US" sz="1250" dirty="0">
+                <a:solidFill>
+                  <a:srgbClr val="E6EDF2"/>
+                </a:solidFill>
+                <a:latin typeface="Courier New" pitchFamily="34" charset="0"/>
+                <a:ea typeface="Courier New" pitchFamily="34" charset="-122"/>
+                <a:cs typeface="Courier New" pitchFamily="34" charset="-120"/>
+              </a:rPr>
+              <a:t>        }</a:t>
+            </a:r>
+            <a:endParaRPr lang="en-US" sz="1250" dirty="0"/>
+          </a:p>
+          <a:p>
+            <a:pPr indent="0" marL="0">
+              <a:buNone/>
+            </a:pPr>
+            <a:r>
+              <a:rPr lang="en-US" sz="1250" dirty="0">
+                <a:solidFill>
+                  <a:srgbClr val="E6EDF2"/>
+                </a:solidFill>
+                <a:latin typeface="Courier New" pitchFamily="34" charset="0"/>
+                <a:ea typeface="Courier New" pitchFamily="34" charset="-122"/>
+                <a:cs typeface="Courier New" pitchFamily="34" charset="-120"/>
+              </a:rPr>
               <a:t>    }</a:t>
             </a:r>
-            <a:endParaRPr lang="en-US" sz="1000" dirty="0"/>
+            <a:endParaRPr lang="en-US" sz="1250" dirty="0"/>
           </a:p>
         </p:txBody>
       </p:sp>
@@ -34137,7 +34392,7 @@
               <a:buNone/>
             </a:pPr>
             <a:r>
-              <a:rPr lang="en-US" sz="1050" dirty="0">
+              <a:rPr lang="en-US" sz="1250" dirty="0">
                 <a:solidFill>
                   <a:srgbClr val="E6EDF2"/>
                 </a:solidFill>
@@ -34151,7 +34406,7 @@
               <a:buNone/>
             </a:pPr>
             <a:r>
-              <a:rPr lang="en-US" sz="1050" dirty="0">
+              <a:rPr lang="en-US" sz="1250" dirty="0">
                 <a:solidFill>
                   <a:srgbClr val="8FB3A0"/>
                 </a:solidFill>
@@ -34161,14 +34416,14 @@
               </a:rPr>
               <a:t>/* la pallina tocca un mattoncino? */</a:t>
             </a:r>
-            <a:endParaRPr lang="en-US" sz="1050" dirty="0"/>
+            <a:endParaRPr lang="en-US" sz="1250" dirty="0"/>
           </a:p>
           <a:p>
             <a:pPr indent="0" marL="0">
               <a:buNone/>
             </a:pPr>
             <a:r>
-              <a:rPr lang="en-US" sz="1050" dirty="0">
+              <a:rPr lang="en-US" sz="1250" dirty="0">
                 <a:solidFill>
                   <a:srgbClr val="E6EDF2"/>
                 </a:solidFill>
@@ -34178,14 +34433,14 @@
               </a:rPr>
               <a:t>    for (int i = 0; i &lt; BRICK_COUNT; i++) {</a:t>
             </a:r>
-            <a:endParaRPr lang="en-US" sz="1050" dirty="0"/>
+            <a:endParaRPr lang="en-US" sz="1250" dirty="0"/>
           </a:p>
           <a:p>
             <a:pPr indent="0" marL="0">
               <a:buNone/>
             </a:pPr>
             <a:r>
-              <a:rPr lang="en-US" sz="1050" dirty="0">
+              <a:rPr lang="en-US" sz="1250" dirty="0">
                 <a:solidFill>
                   <a:srgbClr val="E6EDF2"/>
                 </a:solidFill>
@@ -34195,14 +34450,14 @@
               </a:rPr>
               <a:t>        if (bricks[i] &amp;&amp;</a:t>
             </a:r>
-            <a:endParaRPr lang="en-US" sz="1050" dirty="0"/>
+            <a:endParaRPr lang="en-US" sz="1250" dirty="0"/>
           </a:p>
           <a:p>
             <a:pPr indent="0" marL="0">
               <a:buNone/>
             </a:pPr>
             <a:r>
-              <a:rPr lang="en-US" sz="1050" dirty="0">
+              <a:rPr lang="en-US" sz="1250" dirty="0">
                 <a:solidFill>
                   <a:srgbClr val="E6EDF2"/>
                 </a:solidFill>
@@ -34210,16 +34465,16 @@
                 <a:ea typeface="Courier New" pitchFamily="34" charset="-122"/>
                 <a:cs typeface="Courier New" pitchFamily="34" charset="-120"/>
               </a:rPr>
-              <a:t>            prg32_sprite_hitbox(ball_x, ball_y, BALL_SIZE, BALL_SIZE,</a:t>
-            </a:r>
-            <a:endParaRPr lang="en-US" sz="1050" dirty="0"/>
+              <a:t>            prg32_sprite_hitbox(ball_x, ball_y, BALL_SIZE,</a:t>
+            </a:r>
+            <a:endParaRPr lang="en-US" sz="1250" dirty="0"/>
           </a:p>
           <a:p>
             <a:pPr indent="0" marL="0">
               <a:buNone/>
             </a:pPr>
             <a:r>
-              <a:rPr lang="en-US" sz="1050" dirty="0">
+              <a:rPr lang="en-US" sz="1250" dirty="0">
                 <a:solidFill>
                   <a:srgbClr val="E6EDF2"/>
                 </a:solidFill>
@@ -34227,16 +34482,16 @@
                 <a:ea typeface="Courier New" pitchFamily="34" charset="-122"/>
                 <a:cs typeface="Courier New" pitchFamily="34" charset="-120"/>
               </a:rPr>
-              <a:t>                                brick_x(i), brick_y(i), BRICK_W, BRICK_H)) {</a:t>
-            </a:r>
-            <a:endParaRPr lang="en-US" sz="1050" dirty="0"/>
+              <a:t>                BALL_SIZE,</a:t>
+            </a:r>
+            <a:endParaRPr lang="en-US" sz="1250" dirty="0"/>
           </a:p>
           <a:p>
             <a:pPr indent="0" marL="0">
               <a:buNone/>
             </a:pPr>
             <a:r>
-              <a:rPr lang="en-US" sz="1050" dirty="0">
+              <a:rPr lang="en-US" sz="1250" dirty="0">
                 <a:solidFill>
                   <a:srgbClr val="E6EDF2"/>
                 </a:solidFill>
@@ -34244,30 +34499,33 @@
                 <a:ea typeface="Courier New" pitchFamily="34" charset="-122"/>
                 <a:cs typeface="Courier New" pitchFamily="34" charset="-120"/>
               </a:rPr>
-              <a:t>            bricks[i] = 0;       </a:t>
-            </a:r>
+              <a:t>                                brick_x(i), brick_y(i), BRICK_W,</a:t>
+            </a:r>
+            <a:endParaRPr lang="en-US" sz="1250" dirty="0"/>
+          </a:p>
+          <a:p>
             <a:pPr indent="0" marL="0">
               <a:buNone/>
             </a:pPr>
             <a:r>
-              <a:rPr lang="en-US" sz="1050" dirty="0">
-                <a:solidFill>
-                  <a:srgbClr val="8FB3A0"/>
+              <a:rPr lang="en-US" sz="1250" dirty="0">
+                <a:solidFill>
+                  <a:srgbClr val="E6EDF2"/>
                 </a:solidFill>
                 <a:latin typeface="Courier New" pitchFamily="34" charset="0"/>
                 <a:ea typeface="Courier New" pitchFamily="34" charset="-122"/>
                 <a:cs typeface="Courier New" pitchFamily="34" charset="-120"/>
               </a:rPr>
-              <a:t>/* il mattoncino sparisce */</a:t>
-            </a:r>
-            <a:endParaRPr lang="en-US" sz="1050" dirty="0"/>
+              <a:t>                                    BRICK_H)) {</a:t>
+            </a:r>
+            <a:endParaRPr lang="en-US" sz="1250" dirty="0"/>
           </a:p>
           <a:p>
             <a:pPr indent="0" marL="0">
               <a:buNone/>
             </a:pPr>
             <a:r>
-              <a:rPr lang="en-US" sz="1050" dirty="0">
+              <a:rPr lang="en-US" sz="1250" dirty="0">
                 <a:solidFill>
                   <a:srgbClr val="E6EDF2"/>
                 </a:solidFill>
@@ -34275,13 +34533,13 @@
                 <a:ea typeface="Courier New" pitchFamily="34" charset="-122"/>
                 <a:cs typeface="Courier New" pitchFamily="34" charset="-120"/>
               </a:rPr>
-              <a:t>            ball_dy = -ball_dy;  </a:t>
+              <a:t>            bricks[i] = 0;       </a:t>
             </a:r>
             <a:pPr indent="0" marL="0">
               <a:buNone/>
             </a:pPr>
             <a:r>
-              <a:rPr lang="en-US" sz="1050" dirty="0">
+              <a:rPr lang="en-US" sz="1250" dirty="0">
                 <a:solidFill>
                   <a:srgbClr val="8FB3A0"/>
                 </a:solidFill>
@@ -34289,16 +34547,16 @@
                 <a:ea typeface="Courier New" pitchFamily="34" charset="-122"/>
                 <a:cs typeface="Courier New" pitchFamily="34" charset="-120"/>
               </a:rPr>
-              <a:t>/* la pallina torna indietro */</a:t>
-            </a:r>
-            <a:endParaRPr lang="en-US" sz="1050" dirty="0"/>
+              <a:t>/* il mattoncino sparisce */</a:t>
+            </a:r>
+            <a:endParaRPr lang="en-US" sz="1250" dirty="0"/>
           </a:p>
           <a:p>
             <a:pPr indent="0" marL="0">
               <a:buNone/>
             </a:pPr>
             <a:r>
-              <a:rPr lang="en-US" sz="1050" dirty="0">
+              <a:rPr lang="en-US" sz="1250" dirty="0">
                 <a:solidFill>
                   <a:srgbClr val="E6EDF2"/>
                 </a:solidFill>
@@ -34306,47 +34564,47 @@
                 <a:ea typeface="Courier New" pitchFamily="34" charset="-122"/>
                 <a:cs typeface="Courier New" pitchFamily="34" charset="-120"/>
               </a:rPr>
-              <a:t>            score += 1;</a:t>
-            </a:r>
-            <a:endParaRPr lang="en-US" sz="1050" dirty="0"/>
-          </a:p>
-          <a:p>
+              <a:t>            ball_dy = -ball_dy;  </a:t>
+            </a:r>
             <a:pPr indent="0" marL="0">
               <a:buNone/>
             </a:pPr>
             <a:r>
-              <a:rPr lang="en-US" sz="1050" dirty="0">
-                <a:solidFill>
-                  <a:srgbClr val="E6EDF2"/>
+              <a:rPr lang="en-US" sz="1250" dirty="0">
+                <a:solidFill>
+                  <a:srgbClr val="8FB3A0"/>
                 </a:solidFill>
                 <a:latin typeface="Courier New" pitchFamily="34" charset="0"/>
                 <a:ea typeface="Courier New" pitchFamily="34" charset="-122"/>
                 <a:cs typeface="Courier New" pitchFamily="34" charset="-120"/>
               </a:rPr>
-              <a:t>            prg32_audio_note(0, 0, 76, 255, 40); </a:t>
-            </a:r>
+              <a:t>/* la pallina torna indietro */</a:t>
+            </a:r>
+            <a:endParaRPr lang="en-US" sz="1250" dirty="0"/>
+          </a:p>
+          <a:p>
             <a:pPr indent="0" marL="0">
               <a:buNone/>
             </a:pPr>
             <a:r>
-              <a:rPr lang="en-US" sz="1050" dirty="0">
-                <a:solidFill>
-                  <a:srgbClr val="8FB3A0"/>
+              <a:rPr lang="en-US" sz="1250" dirty="0">
+                <a:solidFill>
+                  <a:srgbClr val="E6EDF2"/>
                 </a:solidFill>
                 <a:latin typeface="Courier New" pitchFamily="34" charset="0"/>
                 <a:ea typeface="Courier New" pitchFamily="34" charset="-122"/>
                 <a:cs typeface="Courier New" pitchFamily="34" charset="-120"/>
               </a:rPr>
-              <a:t>/* Mi acuto */</a:t>
-            </a:r>
-            <a:endParaRPr lang="en-US" sz="1050" dirty="0"/>
+              <a:t>            score += 1;</a:t>
+            </a:r>
+            <a:endParaRPr lang="en-US" sz="1250" dirty="0"/>
           </a:p>
           <a:p>
             <a:pPr indent="0" marL="0">
               <a:buNone/>
             </a:pPr>
             <a:r>
-              <a:rPr lang="en-US" sz="1050" dirty="0">
+              <a:rPr lang="en-US" sz="1250" dirty="0">
                 <a:solidFill>
                   <a:srgbClr val="E6EDF2"/>
                 </a:solidFill>
@@ -34354,13 +34612,13 @@
                 <a:ea typeface="Courier New" pitchFamily="34" charset="-122"/>
                 <a:cs typeface="Courier New" pitchFamily="34" charset="-120"/>
               </a:rPr>
-              <a:t>            break;               </a:t>
+              <a:t>            prg32_audio_note(0, 0, 76, 255, 40); </a:t>
             </a:r>
             <a:pPr indent="0" marL="0">
               <a:buNone/>
             </a:pPr>
             <a:r>
-              <a:rPr lang="en-US" sz="1050" dirty="0">
+              <a:rPr lang="en-US" sz="1250" dirty="0">
                 <a:solidFill>
                   <a:srgbClr val="8FB3A0"/>
                 </a:solidFill>
@@ -34368,16 +34626,16 @@
                 <a:ea typeface="Courier New" pitchFamily="34" charset="-122"/>
                 <a:cs typeface="Courier New" pitchFamily="34" charset="-120"/>
               </a:rPr>
-              <a:t>/* al massimo uno per fotogramma */</a:t>
-            </a:r>
-            <a:endParaRPr lang="en-US" sz="1050" dirty="0"/>
+              <a:t>/* Mi acuto */</a:t>
+            </a:r>
+            <a:endParaRPr lang="en-US" sz="1250" dirty="0"/>
           </a:p>
           <a:p>
             <a:pPr indent="0" marL="0">
               <a:buNone/>
             </a:pPr>
             <a:r>
-              <a:rPr lang="en-US" sz="1050" dirty="0">
+              <a:rPr lang="en-US" sz="1250" dirty="0">
                 <a:solidFill>
                   <a:srgbClr val="E6EDF2"/>
                 </a:solidFill>
@@ -34385,33 +34643,30 @@
                 <a:ea typeface="Courier New" pitchFamily="34" charset="-122"/>
                 <a:cs typeface="Courier New" pitchFamily="34" charset="-120"/>
               </a:rPr>
-              <a:t>        }</a:t>
-            </a:r>
-            <a:endParaRPr lang="en-US" sz="1050" dirty="0"/>
-          </a:p>
-          <a:p>
+              <a:t>            break;               </a:t>
+            </a:r>
             <a:pPr indent="0" marL="0">
               <a:buNone/>
             </a:pPr>
             <a:r>
-              <a:rPr lang="en-US" sz="1050" dirty="0">
-                <a:solidFill>
-                  <a:srgbClr val="E6EDF2"/>
+              <a:rPr lang="en-US" sz="1250" dirty="0">
+                <a:solidFill>
+                  <a:srgbClr val="8FB3A0"/>
                 </a:solidFill>
                 <a:latin typeface="Courier New" pitchFamily="34" charset="0"/>
                 <a:ea typeface="Courier New" pitchFamily="34" charset="-122"/>
                 <a:cs typeface="Courier New" pitchFamily="34" charset="-120"/>
               </a:rPr>
-              <a:t>    }</a:t>
-            </a:r>
-            <a:endParaRPr lang="en-US" sz="1050" dirty="0"/>
+              <a:t>/* al massimo uno per fotogramma</a:t>
+            </a:r>
+            <a:endParaRPr lang="en-US" sz="1250" dirty="0"/>
           </a:p>
           <a:p>
             <a:pPr indent="0" marL="0">
               <a:buNone/>
             </a:pPr>
             <a:r>
-              <a:rPr lang="en-US" sz="1050" dirty="0">
+              <a:rPr lang="en-US" sz="1250" dirty="0">
                 <a:solidFill>
                   <a:srgbClr val="E6EDF2"/>
                 </a:solidFill>
@@ -34419,9 +34674,60 @@
                 <a:ea typeface="Courier New" pitchFamily="34" charset="-122"/>
                 <a:cs typeface="Courier New" pitchFamily="34" charset="-120"/>
               </a:rPr>
+              <a:t>                */</a:t>
+            </a:r>
+            <a:endParaRPr lang="en-US" sz="1250" dirty="0"/>
+          </a:p>
+          <a:p>
+            <a:pPr indent="0" marL="0">
+              <a:buNone/>
+            </a:pPr>
+            <a:r>
+              <a:rPr lang="en-US" sz="1250" dirty="0">
+                <a:solidFill>
+                  <a:srgbClr val="E6EDF2"/>
+                </a:solidFill>
+                <a:latin typeface="Courier New" pitchFamily="34" charset="0"/>
+                <a:ea typeface="Courier New" pitchFamily="34" charset="-122"/>
+                <a:cs typeface="Courier New" pitchFamily="34" charset="-120"/>
+              </a:rPr>
+              <a:t>        }</a:t>
+            </a:r>
+            <a:endParaRPr lang="en-US" sz="1250" dirty="0"/>
+          </a:p>
+          <a:p>
+            <a:pPr indent="0" marL="0">
+              <a:buNone/>
+            </a:pPr>
+            <a:r>
+              <a:rPr lang="en-US" sz="1250" dirty="0">
+                <a:solidFill>
+                  <a:srgbClr val="E6EDF2"/>
+                </a:solidFill>
+                <a:latin typeface="Courier New" pitchFamily="34" charset="0"/>
+                <a:ea typeface="Courier New" pitchFamily="34" charset="-122"/>
+                <a:cs typeface="Courier New" pitchFamily="34" charset="-120"/>
+              </a:rPr>
+              <a:t>    }</a:t>
+            </a:r>
+            <a:endParaRPr lang="en-US" sz="1250" dirty="0"/>
+          </a:p>
+          <a:p>
+            <a:pPr indent="0" marL="0">
+              <a:buNone/>
+            </a:pPr>
+            <a:r>
+              <a:rPr lang="en-US" sz="1250" dirty="0">
+                <a:solidFill>
+                  <a:srgbClr val="E6EDF2"/>
+                </a:solidFill>
+                <a:latin typeface="Courier New" pitchFamily="34" charset="0"/>
+                <a:ea typeface="Courier New" pitchFamily="34" charset="-122"/>
+                <a:cs typeface="Courier New" pitchFamily="34" charset="-120"/>
+              </a:rPr>
               <a:t>}</a:t>
             </a:r>
-            <a:endParaRPr lang="en-US" sz="1050" dirty="0"/>
+            <a:endParaRPr lang="en-US" sz="1250" dirty="0"/>
           </a:p>
         </p:txBody>
       </p:sp>
